--- a/02_презентация/презентация_v6/Презентация_v6_Не_просто_накормить.pptx
+++ b/02_презентация/презентация_v6/Презентация_v6_Не_просто_накормить.pptx
@@ -28343,13 +28343,208 @@
       </p:sp>
       <p:sp>
         <p:nvSpPr>
-          <p:cNvPr id="8" name="Oval 7"/>
+          <p:cNvPr id="8" name="TextBox 7"/>
+          <p:cNvSpPr txBox="1"/>
+          <p:nvPr/>
+        </p:nvSpPr>
+        <p:spPr>
+          <a:xfrm>
+            <a:off x="475488" y="3611880"/>
+            <a:ext cx="365760" cy="274320"/>
+          </a:xfrm>
+          <a:prstGeom prst="rect">
+            <a:avLst/>
+          </a:prstGeom>
+          <a:noFill/>
+        </p:spPr>
+        <p:txBody>
+          <a:bodyPr wrap="square" anchor="t" lIns="0" rIns="0" tIns="0" bIns="0">
+            <a:spAutoFit/>
+          </a:bodyPr>
+          <a:lstStyle/>
+          <a:p>
+            <a:pPr algn="ctr">
+              <a:lnSpc>
+                <a:spcPct val="130000"/>
+              </a:lnSpc>
+            </a:pPr>
+            <a:r>
+              <a:rPr sz="1000" b="0" i="0">
+                <a:solidFill>
+                  <a:srgbClr val="87867F"/>
+                </a:solidFill>
+                <a:latin typeface="PT Sans"/>
+              </a:rPr>
+              <a:t>00</a:t>
+            </a:r>
+          </a:p>
+        </p:txBody>
+      </p:sp>
+      <p:sp>
+        <p:nvSpPr>
+          <p:cNvPr id="9" name="TextBox 8"/>
+          <p:cNvSpPr txBox="1"/>
+          <p:nvPr/>
+        </p:nvSpPr>
+        <p:spPr>
+          <a:xfrm>
+            <a:off x="3195828" y="3611880"/>
+            <a:ext cx="365760" cy="274320"/>
+          </a:xfrm>
+          <a:prstGeom prst="rect">
+            <a:avLst/>
+          </a:prstGeom>
+          <a:noFill/>
+        </p:spPr>
+        <p:txBody>
+          <a:bodyPr wrap="square" anchor="t" lIns="0" rIns="0" tIns="0" bIns="0">
+            <a:spAutoFit/>
+          </a:bodyPr>
+          <a:lstStyle/>
+          <a:p>
+            <a:pPr algn="ctr">
+              <a:lnSpc>
+                <a:spcPct val="130000"/>
+              </a:lnSpc>
+            </a:pPr>
+            <a:r>
+              <a:rPr sz="1000" b="0" i="0">
+                <a:solidFill>
+                  <a:srgbClr val="87867F"/>
+                </a:solidFill>
+                <a:latin typeface="PT Sans"/>
+              </a:rPr>
+              <a:t>06</a:t>
+            </a:r>
+          </a:p>
+        </p:txBody>
+      </p:sp>
+      <p:sp>
+        <p:nvSpPr>
+          <p:cNvPr id="10" name="TextBox 9"/>
+          <p:cNvSpPr txBox="1"/>
+          <p:nvPr/>
+        </p:nvSpPr>
+        <p:spPr>
+          <a:xfrm>
+            <a:off x="5916168" y="3611880"/>
+            <a:ext cx="365760" cy="274320"/>
+          </a:xfrm>
+          <a:prstGeom prst="rect">
+            <a:avLst/>
+          </a:prstGeom>
+          <a:noFill/>
+        </p:spPr>
+        <p:txBody>
+          <a:bodyPr wrap="square" anchor="t" lIns="0" rIns="0" tIns="0" bIns="0">
+            <a:spAutoFit/>
+          </a:bodyPr>
+          <a:lstStyle/>
+          <a:p>
+            <a:pPr algn="ctr">
+              <a:lnSpc>
+                <a:spcPct val="130000"/>
+              </a:lnSpc>
+            </a:pPr>
+            <a:r>
+              <a:rPr sz="1000" b="0" i="0">
+                <a:solidFill>
+                  <a:srgbClr val="87867F"/>
+                </a:solidFill>
+                <a:latin typeface="PT Sans"/>
+              </a:rPr>
+              <a:t>12</a:t>
+            </a:r>
+          </a:p>
+        </p:txBody>
+      </p:sp>
+      <p:sp>
+        <p:nvSpPr>
+          <p:cNvPr id="11" name="TextBox 10"/>
+          <p:cNvSpPr txBox="1"/>
+          <p:nvPr/>
+        </p:nvSpPr>
+        <p:spPr>
+          <a:xfrm>
+            <a:off x="8636508" y="3611880"/>
+            <a:ext cx="365760" cy="274320"/>
+          </a:xfrm>
+          <a:prstGeom prst="rect">
+            <a:avLst/>
+          </a:prstGeom>
+          <a:noFill/>
+        </p:spPr>
+        <p:txBody>
+          <a:bodyPr wrap="square" anchor="t" lIns="0" rIns="0" tIns="0" bIns="0">
+            <a:spAutoFit/>
+          </a:bodyPr>
+          <a:lstStyle/>
+          <a:p>
+            <a:pPr algn="ctr">
+              <a:lnSpc>
+                <a:spcPct val="130000"/>
+              </a:lnSpc>
+            </a:pPr>
+            <a:r>
+              <a:rPr sz="1000" b="0" i="0">
+                <a:solidFill>
+                  <a:srgbClr val="87867F"/>
+                </a:solidFill>
+                <a:latin typeface="PT Sans"/>
+              </a:rPr>
+              <a:t>18</a:t>
+            </a:r>
+          </a:p>
+        </p:txBody>
+      </p:sp>
+      <p:sp>
+        <p:nvSpPr>
+          <p:cNvPr id="12" name="TextBox 11"/>
+          <p:cNvSpPr txBox="1"/>
+          <p:nvPr/>
+        </p:nvSpPr>
+        <p:spPr>
+          <a:xfrm>
+            <a:off x="11356848" y="3611880"/>
+            <a:ext cx="365760" cy="274320"/>
+          </a:xfrm>
+          <a:prstGeom prst="rect">
+            <a:avLst/>
+          </a:prstGeom>
+          <a:noFill/>
+        </p:spPr>
+        <p:txBody>
+          <a:bodyPr wrap="square" anchor="t" lIns="0" rIns="0" tIns="0" bIns="0">
+            <a:spAutoFit/>
+          </a:bodyPr>
+          <a:lstStyle/>
+          <a:p>
+            <a:pPr algn="ctr">
+              <a:lnSpc>
+                <a:spcPct val="130000"/>
+              </a:lnSpc>
+            </a:pPr>
+            <a:r>
+              <a:rPr sz="1000" b="0" i="0">
+                <a:solidFill>
+                  <a:srgbClr val="87867F"/>
+                </a:solidFill>
+                <a:latin typeface="PT Sans"/>
+              </a:rPr>
+              <a:t>24</a:t>
+            </a:r>
+          </a:p>
+        </p:txBody>
+      </p:sp>
+      <p:sp>
+        <p:nvSpPr>
+          <p:cNvPr id="13" name="Oval 12"/>
           <p:cNvSpPr/>
           <p:nvPr/>
         </p:nvSpPr>
         <p:spPr>
           <a:xfrm>
-            <a:off x="4437217" y="3127248"/>
+            <a:off x="4428073" y="3127248"/>
             <a:ext cx="164592" cy="237744"/>
           </a:xfrm>
           <a:prstGeom prst="ellipse">
@@ -28388,13 +28583,13 @@
       </p:sp>
       <p:sp>
         <p:nvSpPr>
-          <p:cNvPr id="9" name="Oval 8"/>
+          <p:cNvPr id="14" name="Oval 13"/>
           <p:cNvSpPr/>
           <p:nvPr/>
         </p:nvSpPr>
         <p:spPr>
           <a:xfrm>
-            <a:off x="6482913" y="3127248"/>
+            <a:off x="6473769" y="3127248"/>
             <a:ext cx="164592" cy="237744"/>
           </a:xfrm>
           <a:prstGeom prst="ellipse">
@@ -28433,13 +28628,13 @@
       </p:sp>
       <p:sp>
         <p:nvSpPr>
-          <p:cNvPr id="10" name="Oval 9"/>
+          <p:cNvPr id="15" name="Oval 14"/>
           <p:cNvSpPr/>
           <p:nvPr/>
         </p:nvSpPr>
         <p:spPr>
           <a:xfrm>
-            <a:off x="8517727" y="3127248"/>
+            <a:off x="8508583" y="3127248"/>
             <a:ext cx="164592" cy="237744"/>
           </a:xfrm>
           <a:prstGeom prst="ellipse">
@@ -28478,16 +28673,320 @@
       </p:sp>
       <p:sp>
         <p:nvSpPr>
-          <p:cNvPr id="11" name="Rectangle 10"/>
+          <p:cNvPr id="16" name="TextBox 15"/>
+          <p:cNvSpPr txBox="1"/>
+          <p:nvPr/>
+        </p:nvSpPr>
+        <p:spPr>
+          <a:xfrm>
+            <a:off x="3870289" y="3931920"/>
+            <a:ext cx="1280160" cy="274320"/>
+          </a:xfrm>
+          <a:prstGeom prst="rect">
+            <a:avLst/>
+          </a:prstGeom>
+          <a:noFill/>
+        </p:spPr>
+        <p:txBody>
+          <a:bodyPr wrap="square" anchor="t" lIns="0" rIns="0" tIns="0" bIns="0">
+            <a:spAutoFit/>
+          </a:bodyPr>
+          <a:lstStyle/>
+          <a:p>
+            <a:pPr algn="ctr">
+              <a:lnSpc>
+                <a:spcPct val="130000"/>
+              </a:lnSpc>
+            </a:pPr>
+            <a:r>
+              <a:rPr sz="1100" b="0" i="0">
+                <a:solidFill>
+                  <a:srgbClr val="141413"/>
+                </a:solidFill>
+                <a:latin typeface="PT Sans"/>
+              </a:rPr>
+              <a:t>завтрак</a:t>
+            </a:r>
+          </a:p>
+        </p:txBody>
+      </p:sp>
+      <p:sp>
+        <p:nvSpPr>
+          <p:cNvPr id="17" name="TextBox 16"/>
+          <p:cNvSpPr txBox="1"/>
+          <p:nvPr/>
+        </p:nvSpPr>
+        <p:spPr>
+          <a:xfrm>
+            <a:off x="3870289" y="4206240"/>
+            <a:ext cx="1280160" cy="274320"/>
+          </a:xfrm>
+          <a:prstGeom prst="rect">
+            <a:avLst/>
+          </a:prstGeom>
+          <a:noFill/>
+        </p:spPr>
+        <p:txBody>
+          <a:bodyPr wrap="square" anchor="t" lIns="0" rIns="0" tIns="0" bIns="0">
+            <a:spAutoFit/>
+          </a:bodyPr>
+          <a:lstStyle/>
+          <a:p>
+            <a:pPr algn="ctr">
+              <a:lnSpc>
+                <a:spcPct val="130000"/>
+              </a:lnSpc>
+            </a:pPr>
+            <a:r>
+              <a:rPr sz="900" b="0" i="0">
+                <a:solidFill>
+                  <a:srgbClr val="87867F"/>
+                </a:solidFill>
+                <a:latin typeface="PT Sans"/>
+              </a:rPr>
+              <a:t>8:30</a:t>
+            </a:r>
+          </a:p>
+        </p:txBody>
+      </p:sp>
+      <p:sp>
+        <p:nvSpPr>
+          <p:cNvPr id="18" name="TextBox 17"/>
+          <p:cNvSpPr txBox="1"/>
+          <p:nvPr/>
+        </p:nvSpPr>
+        <p:spPr>
+          <a:xfrm>
+            <a:off x="5915985" y="3931920"/>
+            <a:ext cx="1280160" cy="274320"/>
+          </a:xfrm>
+          <a:prstGeom prst="rect">
+            <a:avLst/>
+          </a:prstGeom>
+          <a:noFill/>
+        </p:spPr>
+        <p:txBody>
+          <a:bodyPr wrap="square" anchor="t" lIns="0" rIns="0" tIns="0" bIns="0">
+            <a:spAutoFit/>
+          </a:bodyPr>
+          <a:lstStyle/>
+          <a:p>
+            <a:pPr algn="ctr">
+              <a:lnSpc>
+                <a:spcPct val="130000"/>
+              </a:lnSpc>
+            </a:pPr>
+            <a:r>
+              <a:rPr sz="1100" b="0" i="0">
+                <a:solidFill>
+                  <a:srgbClr val="141413"/>
+                </a:solidFill>
+                <a:latin typeface="PT Sans"/>
+              </a:rPr>
+              <a:t>обед</a:t>
+            </a:r>
+          </a:p>
+        </p:txBody>
+      </p:sp>
+      <p:sp>
+        <p:nvSpPr>
+          <p:cNvPr id="19" name="TextBox 18"/>
+          <p:cNvSpPr txBox="1"/>
+          <p:nvPr/>
+        </p:nvSpPr>
+        <p:spPr>
+          <a:xfrm>
+            <a:off x="5915985" y="4206240"/>
+            <a:ext cx="1280160" cy="274320"/>
+          </a:xfrm>
+          <a:prstGeom prst="rect">
+            <a:avLst/>
+          </a:prstGeom>
+          <a:noFill/>
+        </p:spPr>
+        <p:txBody>
+          <a:bodyPr wrap="square" anchor="t" lIns="0" rIns="0" tIns="0" bIns="0">
+            <a:spAutoFit/>
+          </a:bodyPr>
+          <a:lstStyle/>
+          <a:p>
+            <a:pPr algn="ctr">
+              <a:lnSpc>
+                <a:spcPct val="130000"/>
+              </a:lnSpc>
+            </a:pPr>
+            <a:r>
+              <a:rPr sz="900" b="0" i="0">
+                <a:solidFill>
+                  <a:srgbClr val="87867F"/>
+                </a:solidFill>
+                <a:latin typeface="PT Sans"/>
+              </a:rPr>
+              <a:t>13:00</a:t>
+            </a:r>
+          </a:p>
+        </p:txBody>
+      </p:sp>
+      <p:sp>
+        <p:nvSpPr>
+          <p:cNvPr id="20" name="TextBox 19"/>
+          <p:cNvSpPr txBox="1"/>
+          <p:nvPr/>
+        </p:nvSpPr>
+        <p:spPr>
+          <a:xfrm>
+            <a:off x="7950799" y="3931920"/>
+            <a:ext cx="1280160" cy="274320"/>
+          </a:xfrm>
+          <a:prstGeom prst="rect">
+            <a:avLst/>
+          </a:prstGeom>
+          <a:noFill/>
+        </p:spPr>
+        <p:txBody>
+          <a:bodyPr wrap="square" anchor="t" lIns="0" rIns="0" tIns="0" bIns="0">
+            <a:spAutoFit/>
+          </a:bodyPr>
+          <a:lstStyle/>
+          <a:p>
+            <a:pPr algn="ctr">
+              <a:lnSpc>
+                <a:spcPct val="130000"/>
+              </a:lnSpc>
+            </a:pPr>
+            <a:r>
+              <a:rPr sz="1100" b="0" i="0">
+                <a:solidFill>
+                  <a:srgbClr val="141413"/>
+                </a:solidFill>
+                <a:latin typeface="PT Sans"/>
+              </a:rPr>
+              <a:t>ужин</a:t>
+            </a:r>
+          </a:p>
+        </p:txBody>
+      </p:sp>
+      <p:sp>
+        <p:nvSpPr>
+          <p:cNvPr id="21" name="TextBox 20"/>
+          <p:cNvSpPr txBox="1"/>
+          <p:nvPr/>
+        </p:nvSpPr>
+        <p:spPr>
+          <a:xfrm>
+            <a:off x="7950799" y="4206240"/>
+            <a:ext cx="1280160" cy="274320"/>
+          </a:xfrm>
+          <a:prstGeom prst="rect">
+            <a:avLst/>
+          </a:prstGeom>
+          <a:noFill/>
+        </p:spPr>
+        <p:txBody>
+          <a:bodyPr wrap="square" anchor="t" lIns="0" rIns="0" tIns="0" bIns="0">
+            <a:spAutoFit/>
+          </a:bodyPr>
+          <a:lstStyle/>
+          <a:p>
+            <a:pPr algn="ctr">
+              <a:lnSpc>
+                <a:spcPct val="130000"/>
+              </a:lnSpc>
+            </a:pPr>
+            <a:r>
+              <a:rPr sz="900" b="0" i="0">
+                <a:solidFill>
+                  <a:srgbClr val="87867F"/>
+                </a:solidFill>
+                <a:latin typeface="PT Sans"/>
+              </a:rPr>
+              <a:t>17:30</a:t>
+            </a:r>
+          </a:p>
+        </p:txBody>
+      </p:sp>
+      <p:cxnSp>
+        <p:nvCxnSpPr>
+          <p:cNvPr id="22" name="Connector 21"/>
+          <p:cNvCxnSpPr/>
+          <p:nvPr/>
+        </p:nvCxnSpPr>
+        <p:spPr>
+          <a:xfrm>
+            <a:off x="8590879" y="2423160"/>
+            <a:ext cx="2948849" cy="0"/>
+          </a:xfrm>
+          <a:prstGeom prst="line">
+            <a:avLst/>
+          </a:prstGeom>
+          <a:ln w="31750">
+            <a:solidFill>
+              <a:srgbClr val="C15F3C"/>
+            </a:solidFill>
+          </a:ln>
+        </p:spPr>
+        <p:style>
+          <a:lnRef idx="2">
+            <a:schemeClr val="accent1"/>
+          </a:lnRef>
+          <a:fillRef idx="0">
+            <a:schemeClr val="accent1"/>
+          </a:fillRef>
+          <a:effectRef idx="1">
+            <a:schemeClr val="accent1"/>
+          </a:effectRef>
+          <a:fontRef idx="minor">
+            <a:schemeClr val="tx1"/>
+          </a:fontRef>
+        </p:style>
+      </p:cxnSp>
+      <p:cxnSp>
+        <p:nvCxnSpPr>
+          <p:cNvPr id="23" name="Connector 22"/>
+          <p:cNvCxnSpPr/>
+          <p:nvPr/>
+        </p:nvCxnSpPr>
+        <p:spPr>
+          <a:xfrm>
+            <a:off x="658368" y="2423160"/>
+            <a:ext cx="3852001" cy="0"/>
+          </a:xfrm>
+          <a:prstGeom prst="line">
+            <a:avLst/>
+          </a:prstGeom>
+          <a:ln w="31750">
+            <a:solidFill>
+              <a:srgbClr val="C15F3C"/>
+            </a:solidFill>
+          </a:ln>
+        </p:spPr>
+        <p:style>
+          <a:lnRef idx="2">
+            <a:schemeClr val="accent1"/>
+          </a:lnRef>
+          <a:fillRef idx="0">
+            <a:schemeClr val="accent1"/>
+          </a:fillRef>
+          <a:effectRef idx="1">
+            <a:schemeClr val="accent1"/>
+          </a:effectRef>
+          <a:fontRef idx="minor">
+            <a:schemeClr val="tx1"/>
+          </a:fontRef>
+        </p:style>
+      </p:cxnSp>
+      <p:sp>
+        <p:nvSpPr>
+          <p:cNvPr id="24" name="Left Arrow 23"/>
           <p:cNvSpPr/>
           <p:nvPr/>
         </p:nvSpPr>
         <p:spPr>
           <a:xfrm>
-            <a:off x="8590879" y="2926080"/>
-            <a:ext cx="6800849" cy="640080"/>
-          </a:xfrm>
-          <a:prstGeom prst="rect">
+            <a:off x="4464649" y="2359152"/>
+            <a:ext cx="164592" cy="128016"/>
+          </a:xfrm>
+          <a:prstGeom prst="leftArrow">
             <a:avLst/>
           </a:prstGeom>
           <a:solidFill>
@@ -28521,14 +29020,57 @@
       </p:sp>
       <p:sp>
         <p:nvSpPr>
-          <p:cNvPr id="12" name="TextBox 11"/>
-          <p:cNvSpPr txBox="1"/>
-          <p:nvPr/>
-        </p:nvSpPr>
-        <p:spPr>
-          <a:xfrm>
-            <a:off x="475488" y="3611880"/>
-            <a:ext cx="365760" cy="274320"/>
+          <p:cNvPr id="25" name="Right Arrow 24"/>
+          <p:cNvSpPr/>
+          <p:nvPr/>
+        </p:nvSpPr>
+        <p:spPr>
+          <a:xfrm>
+            <a:off x="8472007" y="2359152"/>
+            <a:ext cx="164592" cy="128016"/>
+          </a:xfrm>
+          <a:prstGeom prst="rightArrow">
+            <a:avLst/>
+          </a:prstGeom>
+          <a:solidFill>
+            <a:srgbClr val="C15F3C"/>
+          </a:solidFill>
+          <a:ln>
+            <a:noFill/>
+          </a:ln>
+        </p:spPr>
+        <p:style>
+          <a:lnRef idx="1">
+            <a:schemeClr val="accent1"/>
+          </a:lnRef>
+          <a:fillRef idx="3">
+            <a:schemeClr val="accent1"/>
+          </a:fillRef>
+          <a:effectRef idx="2">
+            <a:schemeClr val="accent1"/>
+          </a:effectRef>
+          <a:fontRef idx="minor">
+            <a:schemeClr val="lt1"/>
+          </a:fontRef>
+        </p:style>
+        <p:txBody>
+          <a:bodyPr rtlCol="0" anchor="ctr"/>
+          <a:lstStyle/>
+          <a:p>
+            <a:pPr algn="ctr"/>
+          </a:p>
+        </p:txBody>
+      </p:sp>
+      <p:sp>
+        <p:nvSpPr>
+          <p:cNvPr id="26" name="TextBox 25"/>
+          <p:cNvSpPr txBox="1"/>
+          <p:nvPr/>
+        </p:nvSpPr>
+        <p:spPr>
+          <a:xfrm>
+            <a:off x="5276088" y="1920240"/>
+            <a:ext cx="1645920" cy="320040"/>
           </a:xfrm>
           <a:prstGeom prst="rect">
             <a:avLst/>
@@ -28547,332 +29089,94 @@
               </a:lnSpc>
             </a:pPr>
             <a:r>
-              <a:rPr sz="1000" b="0" i="0">
+              <a:rPr sz="1400" b="1" i="0">
+                <a:solidFill>
+                  <a:srgbClr val="C15F3C"/>
+                </a:solidFill>
+                <a:latin typeface="Playfair Display"/>
+              </a:rPr>
+              <a:t>через полночь  ·  15 ч</a:t>
+            </a:r>
+          </a:p>
+        </p:txBody>
+      </p:sp>
+      <p:cxnSp>
+        <p:nvCxnSpPr>
+          <p:cNvPr id="27" name="Connector 26"/>
+          <p:cNvCxnSpPr/>
+          <p:nvPr/>
+        </p:nvCxnSpPr>
+        <p:spPr>
+          <a:xfrm>
+            <a:off x="11539728" y="2423160"/>
+            <a:ext cx="0" cy="457200"/>
+          </a:xfrm>
+          <a:prstGeom prst="line">
+            <a:avLst/>
+          </a:prstGeom>
+          <a:ln w="12700">
+            <a:solidFill>
+              <a:srgbClr val="C15F3C"/>
+            </a:solidFill>
+          </a:ln>
+        </p:spPr>
+        <p:style>
+          <a:lnRef idx="2">
+            <a:schemeClr val="accent1"/>
+          </a:lnRef>
+          <a:fillRef idx="0">
+            <a:schemeClr val="accent1"/>
+          </a:fillRef>
+          <a:effectRef idx="1">
+            <a:schemeClr val="accent1"/>
+          </a:effectRef>
+          <a:fontRef idx="minor">
+            <a:schemeClr val="tx1"/>
+          </a:fontRef>
+        </p:style>
+      </p:cxnSp>
+      <p:sp>
+        <p:nvSpPr>
+          <p:cNvPr id="28" name="TextBox 27"/>
+          <p:cNvSpPr txBox="1"/>
+          <p:nvPr/>
+        </p:nvSpPr>
+        <p:spPr>
+          <a:xfrm>
+            <a:off x="11082528" y="2221992"/>
+            <a:ext cx="914400" cy="228600"/>
+          </a:xfrm>
+          <a:prstGeom prst="rect">
+            <a:avLst/>
+          </a:prstGeom>
+          <a:noFill/>
+        </p:spPr>
+        <p:txBody>
+          <a:bodyPr wrap="square" anchor="t" lIns="0" rIns="0" tIns="0" bIns="0">
+            <a:spAutoFit/>
+          </a:bodyPr>
+          <a:lstStyle/>
+          <a:p>
+            <a:pPr algn="ctr">
+              <a:lnSpc>
+                <a:spcPct val="130000"/>
+              </a:lnSpc>
+            </a:pPr>
+            <a:r>
+              <a:rPr sz="800" b="0" i="0">
                 <a:solidFill>
                   <a:srgbClr val="87867F"/>
                 </a:solidFill>
                 <a:latin typeface="PT Sans"/>
               </a:rPr>
-              <a:t>00</a:t>
-            </a:r>
-          </a:p>
-        </p:txBody>
-      </p:sp>
-      <p:sp>
-        <p:nvSpPr>
-          <p:cNvPr id="13" name="TextBox 12"/>
-          <p:cNvSpPr txBox="1"/>
-          <p:nvPr/>
-        </p:nvSpPr>
-        <p:spPr>
-          <a:xfrm>
-            <a:off x="3195828" y="3611880"/>
-            <a:ext cx="365760" cy="274320"/>
-          </a:xfrm>
-          <a:prstGeom prst="rect">
-            <a:avLst/>
-          </a:prstGeom>
-          <a:noFill/>
-        </p:spPr>
-        <p:txBody>
-          <a:bodyPr wrap="square" anchor="t" lIns="0" rIns="0" tIns="0" bIns="0">
-            <a:spAutoFit/>
-          </a:bodyPr>
-          <a:lstStyle/>
-          <a:p>
-            <a:pPr algn="ctr">
-              <a:lnSpc>
-                <a:spcPct val="130000"/>
-              </a:lnSpc>
-            </a:pPr>
-            <a:r>
-              <a:rPr sz="1000" b="0" i="0">
-                <a:solidFill>
-                  <a:srgbClr val="87867F"/>
-                </a:solidFill>
-                <a:latin typeface="PT Sans"/>
-              </a:rPr>
-              <a:t>06</a:t>
-            </a:r>
-          </a:p>
-        </p:txBody>
-      </p:sp>
-      <p:sp>
-        <p:nvSpPr>
-          <p:cNvPr id="14" name="TextBox 13"/>
-          <p:cNvSpPr txBox="1"/>
-          <p:nvPr/>
-        </p:nvSpPr>
-        <p:spPr>
-          <a:xfrm>
-            <a:off x="5916168" y="3611880"/>
-            <a:ext cx="365760" cy="274320"/>
-          </a:xfrm>
-          <a:prstGeom prst="rect">
-            <a:avLst/>
-          </a:prstGeom>
-          <a:noFill/>
-        </p:spPr>
-        <p:txBody>
-          <a:bodyPr wrap="square" anchor="t" lIns="0" rIns="0" tIns="0" bIns="0">
-            <a:spAutoFit/>
-          </a:bodyPr>
-          <a:lstStyle/>
-          <a:p>
-            <a:pPr algn="ctr">
-              <a:lnSpc>
-                <a:spcPct val="130000"/>
-              </a:lnSpc>
-            </a:pPr>
-            <a:r>
-              <a:rPr sz="1000" b="0" i="0">
-                <a:solidFill>
-                  <a:srgbClr val="87867F"/>
-                </a:solidFill>
-                <a:latin typeface="PT Sans"/>
-              </a:rPr>
-              <a:t>12</a:t>
-            </a:r>
-          </a:p>
-        </p:txBody>
-      </p:sp>
-      <p:sp>
-        <p:nvSpPr>
-          <p:cNvPr id="15" name="TextBox 14"/>
-          <p:cNvSpPr txBox="1"/>
-          <p:nvPr/>
-        </p:nvSpPr>
-        <p:spPr>
-          <a:xfrm>
-            <a:off x="8636508" y="3611880"/>
-            <a:ext cx="365760" cy="274320"/>
-          </a:xfrm>
-          <a:prstGeom prst="rect">
-            <a:avLst/>
-          </a:prstGeom>
-          <a:noFill/>
-        </p:spPr>
-        <p:txBody>
-          <a:bodyPr wrap="square" anchor="t" lIns="0" rIns="0" tIns="0" bIns="0">
-            <a:spAutoFit/>
-          </a:bodyPr>
-          <a:lstStyle/>
-          <a:p>
-            <a:pPr algn="ctr">
-              <a:lnSpc>
-                <a:spcPct val="130000"/>
-              </a:lnSpc>
-            </a:pPr>
-            <a:r>
-              <a:rPr sz="1000" b="0" i="0">
-                <a:solidFill>
-                  <a:srgbClr val="87867F"/>
-                </a:solidFill>
-                <a:latin typeface="PT Sans"/>
-              </a:rPr>
-              <a:t>18</a:t>
-            </a:r>
-          </a:p>
-        </p:txBody>
-      </p:sp>
-      <p:sp>
-        <p:nvSpPr>
-          <p:cNvPr id="16" name="TextBox 15"/>
-          <p:cNvSpPr txBox="1"/>
-          <p:nvPr/>
-        </p:nvSpPr>
-        <p:spPr>
-          <a:xfrm>
-            <a:off x="11356848" y="3611880"/>
-            <a:ext cx="365760" cy="274320"/>
-          </a:xfrm>
-          <a:prstGeom prst="rect">
-            <a:avLst/>
-          </a:prstGeom>
-          <a:noFill/>
-        </p:spPr>
-        <p:txBody>
-          <a:bodyPr wrap="square" anchor="t" lIns="0" rIns="0" tIns="0" bIns="0">
-            <a:spAutoFit/>
-          </a:bodyPr>
-          <a:lstStyle/>
-          <a:p>
-            <a:pPr algn="ctr">
-              <a:lnSpc>
-                <a:spcPct val="130000"/>
-              </a:lnSpc>
-            </a:pPr>
-            <a:r>
-              <a:rPr sz="1000" b="0" i="0">
-                <a:solidFill>
-                  <a:srgbClr val="87867F"/>
-                </a:solidFill>
-                <a:latin typeface="PT Sans"/>
-              </a:rPr>
-              <a:t>24</a:t>
-            </a:r>
-          </a:p>
-        </p:txBody>
-      </p:sp>
-      <p:sp>
-        <p:nvSpPr>
-          <p:cNvPr id="17" name="TextBox 16"/>
-          <p:cNvSpPr txBox="1"/>
-          <p:nvPr/>
-        </p:nvSpPr>
-        <p:spPr>
-          <a:xfrm>
-            <a:off x="658368" y="3703320"/>
-            <a:ext cx="1371600" cy="274320"/>
-          </a:xfrm>
-          <a:prstGeom prst="rect">
-            <a:avLst/>
-          </a:prstGeom>
-          <a:noFill/>
-        </p:spPr>
-        <p:txBody>
-          <a:bodyPr wrap="square" anchor="t" lIns="0" rIns="0" tIns="0" bIns="0">
-            <a:spAutoFit/>
-          </a:bodyPr>
-          <a:lstStyle/>
-          <a:p>
-            <a:pPr algn="ctr">
-              <a:lnSpc>
-                <a:spcPct val="130000"/>
-              </a:lnSpc>
-            </a:pPr>
-            <a:r>
-              <a:rPr sz="1100" b="0" i="0">
-                <a:solidFill>
-                  <a:srgbClr val="141413"/>
-                </a:solidFill>
-                <a:latin typeface="PT Sans"/>
-              </a:rPr>
-              <a:t>завтрак</a:t>
-            </a:r>
-          </a:p>
-        </p:txBody>
-      </p:sp>
-      <p:sp>
-        <p:nvSpPr>
-          <p:cNvPr id="18" name="TextBox 17"/>
-          <p:cNvSpPr txBox="1"/>
-          <p:nvPr/>
-        </p:nvSpPr>
-        <p:spPr>
-          <a:xfrm>
-            <a:off x="4297680" y="3703320"/>
-            <a:ext cx="1371600" cy="274320"/>
-          </a:xfrm>
-          <a:prstGeom prst="rect">
-            <a:avLst/>
-          </a:prstGeom>
-          <a:noFill/>
-        </p:spPr>
-        <p:txBody>
-          <a:bodyPr wrap="square" anchor="t" lIns="0" rIns="0" tIns="0" bIns="0">
-            <a:spAutoFit/>
-          </a:bodyPr>
-          <a:lstStyle/>
-          <a:p>
-            <a:pPr algn="ctr">
-              <a:lnSpc>
-                <a:spcPct val="130000"/>
-              </a:lnSpc>
-            </a:pPr>
-            <a:r>
-              <a:rPr sz="1100" b="0" i="0">
-                <a:solidFill>
-                  <a:srgbClr val="141413"/>
-                </a:solidFill>
-                <a:latin typeface="PT Sans"/>
-              </a:rPr>
-              <a:t>обед</a:t>
-            </a:r>
-          </a:p>
-        </p:txBody>
-      </p:sp>
-      <p:sp>
-        <p:nvSpPr>
-          <p:cNvPr id="19" name="TextBox 18"/>
-          <p:cNvSpPr txBox="1"/>
-          <p:nvPr/>
-        </p:nvSpPr>
-        <p:spPr>
-          <a:xfrm>
-            <a:off x="6766560" y="3703320"/>
-            <a:ext cx="1371600" cy="274320"/>
-          </a:xfrm>
-          <a:prstGeom prst="rect">
-            <a:avLst/>
-          </a:prstGeom>
-          <a:noFill/>
-        </p:spPr>
-        <p:txBody>
-          <a:bodyPr wrap="square" anchor="t" lIns="0" rIns="0" tIns="0" bIns="0">
-            <a:spAutoFit/>
-          </a:bodyPr>
-          <a:lstStyle/>
-          <a:p>
-            <a:pPr algn="ctr">
-              <a:lnSpc>
-                <a:spcPct val="130000"/>
-              </a:lnSpc>
-            </a:pPr>
-            <a:r>
-              <a:rPr sz="1100" b="0" i="0">
-                <a:solidFill>
-                  <a:srgbClr val="141413"/>
-                </a:solidFill>
-                <a:latin typeface="PT Sans"/>
-              </a:rPr>
-              <a:t>ужин</a:t>
-            </a:r>
-          </a:p>
-        </p:txBody>
-      </p:sp>
-      <p:sp>
-        <p:nvSpPr>
-          <p:cNvPr id="20" name="TextBox 19"/>
-          <p:cNvSpPr txBox="1"/>
-          <p:nvPr/>
-        </p:nvSpPr>
-        <p:spPr>
-          <a:xfrm>
-            <a:off x="7772400" y="2423160"/>
-            <a:ext cx="3657600" cy="365760"/>
-          </a:xfrm>
-          <a:prstGeom prst="rect">
-            <a:avLst/>
-          </a:prstGeom>
-          <a:noFill/>
-        </p:spPr>
-        <p:txBody>
-          <a:bodyPr wrap="square" anchor="t" lIns="0" rIns="0" tIns="0" bIns="0">
-            <a:spAutoFit/>
-          </a:bodyPr>
-          <a:lstStyle/>
-          <a:p>
-            <a:pPr algn="l">
-              <a:lnSpc>
-                <a:spcPct val="130000"/>
-              </a:lnSpc>
-            </a:pPr>
-            <a:r>
-              <a:rPr sz="1400" b="1" i="0">
-                <a:solidFill>
-                  <a:srgbClr val="C15F3C"/>
-                </a:solidFill>
-                <a:latin typeface="Playfair Display"/>
-              </a:rPr>
-              <a:t>ночной интервал:  15 ч</a:t>
-            </a:r>
-          </a:p>
-        </p:txBody>
-      </p:sp>
-      <p:sp>
-        <p:nvSpPr>
-          <p:cNvPr id="21" name="Rounded Rectangle 20"/>
+              <a:t>полночь</a:t>
+            </a:r>
+          </a:p>
+        </p:txBody>
+      </p:sp>
+      <p:sp>
+        <p:nvSpPr>
+          <p:cNvPr id="29" name="Rounded Rectangle 28"/>
           <p:cNvSpPr/>
           <p:nvPr/>
         </p:nvSpPr>
@@ -28917,7 +29221,7 @@
       </p:sp>
       <p:sp>
         <p:nvSpPr>
-          <p:cNvPr id="22" name="TextBox 21"/>
+          <p:cNvPr id="30" name="TextBox 29"/>
           <p:cNvSpPr txBox="1"/>
           <p:nvPr/>
         </p:nvSpPr>
@@ -28956,7 +29260,7 @@
       </p:sp>
       <p:sp>
         <p:nvSpPr>
-          <p:cNvPr id="23" name="TextBox 22"/>
+          <p:cNvPr id="31" name="TextBox 30"/>
           <p:cNvSpPr txBox="1"/>
           <p:nvPr/>
         </p:nvSpPr>
@@ -29027,7 +29331,7 @@
       </p:sp>
       <p:sp>
         <p:nvSpPr>
-          <p:cNvPr id="24" name="Rounded Rectangle 23"/>
+          <p:cNvPr id="32" name="Rounded Rectangle 31"/>
           <p:cNvSpPr/>
           <p:nvPr/>
         </p:nvSpPr>
@@ -29072,7 +29376,7 @@
       </p:sp>
       <p:sp>
         <p:nvSpPr>
-          <p:cNvPr id="25" name="TextBox 24"/>
+          <p:cNvPr id="33" name="TextBox 32"/>
           <p:cNvSpPr txBox="1"/>
           <p:nvPr/>
         </p:nvSpPr>
@@ -29111,7 +29415,7 @@
       </p:sp>
       <p:sp>
         <p:nvSpPr>
-          <p:cNvPr id="26" name="TextBox 25"/>
+          <p:cNvPr id="34" name="TextBox 33"/>
           <p:cNvSpPr txBox="1"/>
           <p:nvPr/>
         </p:nvSpPr>
@@ -29182,7 +29486,7 @@
       </p:sp>
       <p:sp>
         <p:nvSpPr>
-          <p:cNvPr id="27" name="TextBox 26"/>
+          <p:cNvPr id="35" name="TextBox 34"/>
           <p:cNvSpPr txBox="1"/>
           <p:nvPr/>
         </p:nvSpPr>
@@ -29221,7 +29525,7 @@
       </p:sp>
       <p:sp>
         <p:nvSpPr>
-          <p:cNvPr id="28" name="TextBox 27"/>
+          <p:cNvPr id="36" name="TextBox 35"/>
           <p:cNvSpPr txBox="1"/>
           <p:nvPr/>
         </p:nvSpPr>
@@ -29260,7 +29564,7 @@
       </p:sp>
       <p:sp>
         <p:nvSpPr>
-          <p:cNvPr id="29" name="TextBox 28"/>
+          <p:cNvPr id="37" name="TextBox 36"/>
           <p:cNvSpPr txBox="1"/>
           <p:nvPr/>
         </p:nvSpPr>

--- a/02_презентация/презентация_v6/Презентация_v6_Не_просто_накормить.pptx
+++ b/02_презентация/презентация_v6/Презентация_v6_Не_просто_накормить.pptx
@@ -4412,7 +4412,7 @@
                 </a:solidFill>
                 <a:latin typeface="PT Sans"/>
               </a:rPr>
-              <a:t>Источник S035  ·  www.pni9.ru  ·  правила внутреннего распорядка жителей</a:t>
+              <a:t>S035  ·  локальный приказ  ·  архив правил web.archive.org/web/20260415001233  ·  pni9.ru с 21.08.2026 не работает</a:t>
             </a:r>
           </a:p>
         </p:txBody>
@@ -4425,86 +4425,8 @@
         </p:nvSpPr>
         <p:spPr>
           <a:xfrm>
-            <a:off x="658368" y="6446520"/>
-            <a:ext cx="7315200" cy="228600"/>
-          </a:xfrm>
-          <a:prstGeom prst="rect">
-            <a:avLst/>
-          </a:prstGeom>
-          <a:noFill/>
-        </p:spPr>
-        <p:txBody>
-          <a:bodyPr wrap="square" anchor="t" lIns="0" rIns="0" tIns="0" bIns="0">
-            <a:spAutoFit/>
-          </a:bodyPr>
-          <a:lstStyle/>
-          <a:p>
-            <a:pPr algn="l">
-              <a:lnSpc>
-                <a:spcPct val="130000"/>
-              </a:lnSpc>
-            </a:pPr>
-            <a:r>
-              <a:rPr sz="900" b="0" i="0">
-                <a:solidFill>
-                  <a:srgbClr val="87867F"/>
-                </a:solidFill>
-                <a:latin typeface="PT Sans"/>
-              </a:rPr>
-              <a:t>Доклад, раздел 8, 17.12</a:t>
-            </a:r>
-          </a:p>
-        </p:txBody>
-      </p:sp>
-      <p:sp>
-        <p:nvSpPr>
-          <p:cNvPr id="15" name="TextBox 14"/>
-          <p:cNvSpPr txBox="1"/>
-          <p:nvPr/>
-        </p:nvSpPr>
-        <p:spPr>
-          <a:xfrm>
-            <a:off x="10515600" y="6446520"/>
-            <a:ext cx="1005840" cy="228600"/>
-          </a:xfrm>
-          <a:prstGeom prst="rect">
-            <a:avLst/>
-          </a:prstGeom>
-          <a:noFill/>
-        </p:spPr>
-        <p:txBody>
-          <a:bodyPr wrap="square" anchor="t" lIns="0" rIns="0" tIns="0" bIns="0">
-            <a:spAutoFit/>
-          </a:bodyPr>
-          <a:lstStyle/>
-          <a:p>
-            <a:pPr algn="r">
-              <a:lnSpc>
-                <a:spcPct val="130000"/>
-              </a:lnSpc>
-            </a:pPr>
-            <a:r>
-              <a:rPr sz="900" b="0" i="0">
-                <a:solidFill>
-                  <a:srgbClr val="87867F"/>
-                </a:solidFill>
-                <a:latin typeface="PT Sans"/>
-              </a:rPr>
-              <a:t>10 / 18</a:t>
-            </a:r>
-          </a:p>
-        </p:txBody>
-      </p:sp>
-      <p:sp>
-        <p:nvSpPr>
-          <p:cNvPr id="16" name="TextBox 15"/>
-          <p:cNvSpPr txBox="1"/>
-          <p:nvPr/>
-        </p:nvSpPr>
-        <p:spPr>
-          <a:xfrm>
-            <a:off x="10515600" y="6446520"/>
-            <a:ext cx="365760" cy="228600"/>
+            <a:off x="11155680" y="6446520"/>
+            <a:ext cx="640080" cy="228600"/>
           </a:xfrm>
           <a:prstGeom prst="rect">
             <a:avLst/>
@@ -5236,86 +5158,8 @@
         </p:nvSpPr>
         <p:spPr>
           <a:xfrm>
-            <a:off x="658368" y="6446520"/>
-            <a:ext cx="7315200" cy="228600"/>
-          </a:xfrm>
-          <a:prstGeom prst="rect">
-            <a:avLst/>
-          </a:prstGeom>
-          <a:noFill/>
-        </p:spPr>
-        <p:txBody>
-          <a:bodyPr wrap="square" anchor="t" lIns="0" rIns="0" tIns="0" bIns="0">
-            <a:spAutoFit/>
-          </a:bodyPr>
-          <a:lstStyle/>
-          <a:p>
-            <a:pPr algn="l">
-              <a:lnSpc>
-                <a:spcPct val="130000"/>
-              </a:lnSpc>
-            </a:pPr>
-            <a:r>
-              <a:rPr sz="900" b="0" i="0">
-                <a:solidFill>
-                  <a:srgbClr val="87867F"/>
-                </a:solidFill>
-                <a:latin typeface="PT Sans"/>
-              </a:rPr>
-              <a:t>Доклад, раздел 25, 29  ·  программа организаторов</a:t>
-            </a:r>
-          </a:p>
-        </p:txBody>
-      </p:sp>
-      <p:sp>
-        <p:nvSpPr>
-          <p:cNvPr id="19" name="TextBox 18"/>
-          <p:cNvSpPr txBox="1"/>
-          <p:nvPr/>
-        </p:nvSpPr>
-        <p:spPr>
-          <a:xfrm>
-            <a:off x="10515600" y="6446520"/>
-            <a:ext cx="1005840" cy="228600"/>
-          </a:xfrm>
-          <a:prstGeom prst="rect">
-            <a:avLst/>
-          </a:prstGeom>
-          <a:noFill/>
-        </p:spPr>
-        <p:txBody>
-          <a:bodyPr wrap="square" anchor="t" lIns="0" rIns="0" tIns="0" bIns="0">
-            <a:spAutoFit/>
-          </a:bodyPr>
-          <a:lstStyle/>
-          <a:p>
-            <a:pPr algn="r">
-              <a:lnSpc>
-                <a:spcPct val="130000"/>
-              </a:lnSpc>
-            </a:pPr>
-            <a:r>
-              <a:rPr sz="900" b="0" i="0">
-                <a:solidFill>
-                  <a:srgbClr val="87867F"/>
-                </a:solidFill>
-                <a:latin typeface="PT Sans"/>
-              </a:rPr>
-              <a:t>11 / 18</a:t>
-            </a:r>
-          </a:p>
-        </p:txBody>
-      </p:sp>
-      <p:sp>
-        <p:nvSpPr>
-          <p:cNvPr id="20" name="TextBox 19"/>
-          <p:cNvSpPr txBox="1"/>
-          <p:nvPr/>
-        </p:nvSpPr>
-        <p:spPr>
-          <a:xfrm>
-            <a:off x="10515600" y="6446520"/>
-            <a:ext cx="365760" cy="228600"/>
+            <a:off x="11155680" y="6446520"/>
+            <a:ext cx="640080" cy="228600"/>
           </a:xfrm>
           <a:prstGeom prst="rect">
             <a:avLst/>
@@ -5657,7 +5501,7 @@
                 </a:solidFill>
                 <a:latin typeface="Playfair Display"/>
               </a:rPr>
-              <a:t>Приказы 330н, 395н;  СанПиН 2.3/2.4.4282-26, п. 56(11)</a:t>
+              <a:t>Приказы 330н, 395н;  СанПиН 2.3/2.4.4282-26, п. 56(11) — с 01.09.2026, на 26.08 ещё не в силе</a:t>
             </a:r>
           </a:p>
         </p:txBody>
@@ -5891,86 +5735,8 @@
         </p:nvSpPr>
         <p:spPr>
           <a:xfrm>
-            <a:off x="658368" y="6446520"/>
-            <a:ext cx="7315200" cy="228600"/>
-          </a:xfrm>
-          <a:prstGeom prst="rect">
-            <a:avLst/>
-          </a:prstGeom>
-          <a:noFill/>
-        </p:spPr>
-        <p:txBody>
-          <a:bodyPr wrap="square" anchor="t" lIns="0" rIns="0" tIns="0" bIns="0">
-            <a:spAutoFit/>
-          </a:bodyPr>
-          <a:lstStyle/>
-          <a:p>
-            <a:pPr algn="l">
-              <a:lnSpc>
-                <a:spcPct val="130000"/>
-              </a:lnSpc>
-            </a:pPr>
-            <a:r>
-              <a:rPr sz="900" b="0" i="0">
-                <a:solidFill>
-                  <a:srgbClr val="87867F"/>
-                </a:solidFill>
-                <a:latin typeface="PT Sans"/>
-              </a:rPr>
-              <a:t>Доклад, раздел 11, 17  ·  правило «трёх отказов» — врач сегодня</a:t>
-            </a:r>
-          </a:p>
-        </p:txBody>
-      </p:sp>
-      <p:sp>
-        <p:nvSpPr>
-          <p:cNvPr id="15" name="TextBox 14"/>
-          <p:cNvSpPr txBox="1"/>
-          <p:nvPr/>
-        </p:nvSpPr>
-        <p:spPr>
-          <a:xfrm>
-            <a:off x="10515600" y="6446520"/>
-            <a:ext cx="1005840" cy="228600"/>
-          </a:xfrm>
-          <a:prstGeom prst="rect">
-            <a:avLst/>
-          </a:prstGeom>
-          <a:noFill/>
-        </p:spPr>
-        <p:txBody>
-          <a:bodyPr wrap="square" anchor="t" lIns="0" rIns="0" tIns="0" bIns="0">
-            <a:spAutoFit/>
-          </a:bodyPr>
-          <a:lstStyle/>
-          <a:p>
-            <a:pPr algn="r">
-              <a:lnSpc>
-                <a:spcPct val="130000"/>
-              </a:lnSpc>
-            </a:pPr>
-            <a:r>
-              <a:rPr sz="900" b="0" i="0">
-                <a:solidFill>
-                  <a:srgbClr val="87867F"/>
-                </a:solidFill>
-                <a:latin typeface="PT Sans"/>
-              </a:rPr>
-              <a:t>12 / 18</a:t>
-            </a:r>
-          </a:p>
-        </p:txBody>
-      </p:sp>
-      <p:sp>
-        <p:nvSpPr>
-          <p:cNvPr id="16" name="TextBox 15"/>
-          <p:cNvSpPr txBox="1"/>
-          <p:nvPr/>
-        </p:nvSpPr>
-        <p:spPr>
-          <a:xfrm>
-            <a:off x="10515600" y="6446520"/>
-            <a:ext cx="365760" cy="228600"/>
+            <a:off x="11155680" y="6446520"/>
+            <a:ext cx="640080" cy="228600"/>
           </a:xfrm>
           <a:prstGeom prst="rect">
             <a:avLst/>
@@ -7090,86 +6856,8 @@
         </p:nvSpPr>
         <p:spPr>
           <a:xfrm>
-            <a:off x="658368" y="6446520"/>
-            <a:ext cx="7315200" cy="228600"/>
-          </a:xfrm>
-          <a:prstGeom prst="rect">
-            <a:avLst/>
-          </a:prstGeom>
-          <a:noFill/>
-        </p:spPr>
-        <p:txBody>
-          <a:bodyPr wrap="square" anchor="t" lIns="0" rIns="0" tIns="0" bIns="0">
-            <a:spAutoFit/>
-          </a:bodyPr>
-          <a:lstStyle/>
-          <a:p>
-            <a:pPr algn="l">
-              <a:lnSpc>
-                <a:spcPct val="130000"/>
-              </a:lnSpc>
-            </a:pPr>
-            <a:r>
-              <a:rPr sz="900" b="0" i="0">
-                <a:solidFill>
-                  <a:srgbClr val="87867F"/>
-                </a:solidFill>
-                <a:latin typeface="PT Sans"/>
-              </a:rPr>
-              <a:t>Доклад, раздел 19 (пары эквивалентов), 21 (журнал)</a:t>
-            </a:r>
-          </a:p>
-        </p:txBody>
-      </p:sp>
-      <p:sp>
-        <p:nvSpPr>
-          <p:cNvPr id="29" name="TextBox 28"/>
-          <p:cNvSpPr txBox="1"/>
-          <p:nvPr/>
-        </p:nvSpPr>
-        <p:spPr>
-          <a:xfrm>
-            <a:off x="10515600" y="6446520"/>
-            <a:ext cx="1005840" cy="228600"/>
-          </a:xfrm>
-          <a:prstGeom prst="rect">
-            <a:avLst/>
-          </a:prstGeom>
-          <a:noFill/>
-        </p:spPr>
-        <p:txBody>
-          <a:bodyPr wrap="square" anchor="t" lIns="0" rIns="0" tIns="0" bIns="0">
-            <a:spAutoFit/>
-          </a:bodyPr>
-          <a:lstStyle/>
-          <a:p>
-            <a:pPr algn="r">
-              <a:lnSpc>
-                <a:spcPct val="130000"/>
-              </a:lnSpc>
-            </a:pPr>
-            <a:r>
-              <a:rPr sz="900" b="0" i="0">
-                <a:solidFill>
-                  <a:srgbClr val="87867F"/>
-                </a:solidFill>
-                <a:latin typeface="PT Sans"/>
-              </a:rPr>
-              <a:t>13 / 18</a:t>
-            </a:r>
-          </a:p>
-        </p:txBody>
-      </p:sp>
-      <p:sp>
-        <p:nvSpPr>
-          <p:cNvPr id="30" name="TextBox 29"/>
-          <p:cNvSpPr txBox="1"/>
-          <p:nvPr/>
-        </p:nvSpPr>
-        <p:spPr>
-          <a:xfrm>
-            <a:off x="10515600" y="6446520"/>
-            <a:ext cx="365760" cy="228600"/>
+            <a:off x="11155680" y="6446520"/>
+            <a:ext cx="640080" cy="228600"/>
           </a:xfrm>
           <a:prstGeom prst="rect">
             <a:avLst/>
@@ -8156,86 +7844,8 @@
         </p:nvSpPr>
         <p:spPr>
           <a:xfrm>
-            <a:off x="658368" y="6446520"/>
-            <a:ext cx="7315200" cy="228600"/>
-          </a:xfrm>
-          <a:prstGeom prst="rect">
-            <a:avLst/>
-          </a:prstGeom>
-          <a:noFill/>
-        </p:spPr>
-        <p:txBody>
-          <a:bodyPr wrap="square" anchor="t" lIns="0" rIns="0" tIns="0" bIns="0">
-            <a:spAutoFit/>
-          </a:bodyPr>
-          <a:lstStyle/>
-          <a:p>
-            <a:pPr algn="l">
-              <a:lnSpc>
-                <a:spcPct val="130000"/>
-              </a:lnSpc>
-            </a:pPr>
-            <a:r>
-              <a:rPr sz="900" b="0" i="0">
-                <a:solidFill>
-                  <a:srgbClr val="87867F"/>
-                </a:solidFill>
-                <a:latin typeface="PT Sans"/>
-              </a:rPr>
-              <a:t>Ст. 29 ГК  ·  Замечание общего порядка № 1 к ст. 12 КПИ</a:t>
-            </a:r>
-          </a:p>
-        </p:txBody>
-      </p:sp>
-      <p:sp>
-        <p:nvSpPr>
-          <p:cNvPr id="26" name="TextBox 25"/>
-          <p:cNvSpPr txBox="1"/>
-          <p:nvPr/>
-        </p:nvSpPr>
-        <p:spPr>
-          <a:xfrm>
-            <a:off x="10515600" y="6446520"/>
-            <a:ext cx="1005840" cy="228600"/>
-          </a:xfrm>
-          <a:prstGeom prst="rect">
-            <a:avLst/>
-          </a:prstGeom>
-          <a:noFill/>
-        </p:spPr>
-        <p:txBody>
-          <a:bodyPr wrap="square" anchor="t" lIns="0" rIns="0" tIns="0" bIns="0">
-            <a:spAutoFit/>
-          </a:bodyPr>
-          <a:lstStyle/>
-          <a:p>
-            <a:pPr algn="r">
-              <a:lnSpc>
-                <a:spcPct val="130000"/>
-              </a:lnSpc>
-            </a:pPr>
-            <a:r>
-              <a:rPr sz="900" b="0" i="0">
-                <a:solidFill>
-                  <a:srgbClr val="87867F"/>
-                </a:solidFill>
-                <a:latin typeface="PT Sans"/>
-              </a:rPr>
-              <a:t>14 / 18</a:t>
-            </a:r>
-          </a:p>
-        </p:txBody>
-      </p:sp>
-      <p:sp>
-        <p:nvSpPr>
-          <p:cNvPr id="27" name="TextBox 26"/>
-          <p:cNvSpPr txBox="1"/>
-          <p:nvPr/>
-        </p:nvSpPr>
-        <p:spPr>
-          <a:xfrm>
-            <a:off x="10515600" y="6446520"/>
-            <a:ext cx="365760" cy="228600"/>
+            <a:off x="11155680" y="6446520"/>
+            <a:ext cx="640080" cy="228600"/>
           </a:xfrm>
           <a:prstGeom prst="rect">
             <a:avLst/>
@@ -9428,86 +9038,8 @@
         </p:nvSpPr>
         <p:spPr>
           <a:xfrm>
-            <a:off x="658368" y="6446520"/>
-            <a:ext cx="7315200" cy="228600"/>
-          </a:xfrm>
-          <a:prstGeom prst="rect">
-            <a:avLst/>
-          </a:prstGeom>
-          <a:noFill/>
-        </p:spPr>
-        <p:txBody>
-          <a:bodyPr wrap="square" anchor="t" lIns="0" rIns="0" tIns="0" bIns="0">
-            <a:spAutoFit/>
-          </a:bodyPr>
-          <a:lstStyle/>
-          <a:p>
-            <a:pPr algn="l">
-              <a:lnSpc>
-                <a:spcPct val="130000"/>
-              </a:lnSpc>
-            </a:pPr>
-            <a:r>
-              <a:rPr sz="900" b="0" i="0">
-                <a:solidFill>
-                  <a:srgbClr val="87867F"/>
-                </a:solidFill>
-                <a:latin typeface="PT Sans"/>
-              </a:rPr>
-              <a:t>Доклад, раздел 22 (панель чисел), 35 (пилот)</a:t>
-            </a:r>
-          </a:p>
-        </p:txBody>
-      </p:sp>
-      <p:sp>
-        <p:nvSpPr>
-          <p:cNvPr id="31" name="TextBox 30"/>
-          <p:cNvSpPr txBox="1"/>
-          <p:nvPr/>
-        </p:nvSpPr>
-        <p:spPr>
-          <a:xfrm>
-            <a:off x="10515600" y="6446520"/>
-            <a:ext cx="1005840" cy="228600"/>
-          </a:xfrm>
-          <a:prstGeom prst="rect">
-            <a:avLst/>
-          </a:prstGeom>
-          <a:noFill/>
-        </p:spPr>
-        <p:txBody>
-          <a:bodyPr wrap="square" anchor="t" lIns="0" rIns="0" tIns="0" bIns="0">
-            <a:spAutoFit/>
-          </a:bodyPr>
-          <a:lstStyle/>
-          <a:p>
-            <a:pPr algn="r">
-              <a:lnSpc>
-                <a:spcPct val="130000"/>
-              </a:lnSpc>
-            </a:pPr>
-            <a:r>
-              <a:rPr sz="900" b="0" i="0">
-                <a:solidFill>
-                  <a:srgbClr val="87867F"/>
-                </a:solidFill>
-                <a:latin typeface="PT Sans"/>
-              </a:rPr>
-              <a:t>15 / 18</a:t>
-            </a:r>
-          </a:p>
-        </p:txBody>
-      </p:sp>
-      <p:sp>
-        <p:nvSpPr>
-          <p:cNvPr id="32" name="TextBox 31"/>
-          <p:cNvSpPr txBox="1"/>
-          <p:nvPr/>
-        </p:nvSpPr>
-        <p:spPr>
-          <a:xfrm>
-            <a:off x="10515600" y="6446520"/>
-            <a:ext cx="365760" cy="228600"/>
+            <a:off x="11155680" y="6446520"/>
+            <a:ext cx="640080" cy="228600"/>
           </a:xfrm>
           <a:prstGeom prst="rect">
             <a:avLst/>
@@ -10584,86 +10116,8 @@
         </p:nvSpPr>
         <p:spPr>
           <a:xfrm>
-            <a:off x="658368" y="6446520"/>
-            <a:ext cx="7315200" cy="228600"/>
-          </a:xfrm>
-          <a:prstGeom prst="rect">
-            <a:avLst/>
-          </a:prstGeom>
-          <a:noFill/>
-        </p:spPr>
-        <p:txBody>
-          <a:bodyPr wrap="square" anchor="t" lIns="0" rIns="0" tIns="0" bIns="0">
-            <a:spAutoFit/>
-          </a:bodyPr>
-          <a:lstStyle/>
-          <a:p>
-            <a:pPr algn="l">
-              <a:lnSpc>
-                <a:spcPct val="130000"/>
-              </a:lnSpc>
-            </a:pPr>
-            <a:r>
-              <a:rPr sz="900" b="0" i="0">
-                <a:solidFill>
-                  <a:srgbClr val="87867F"/>
-                </a:solidFill>
-                <a:latin typeface="PT Sans"/>
-              </a:rPr>
-              <a:t>Доклад, раздел 17, 22  ·  сценарий 12:30–16:30</a:t>
-            </a:r>
-          </a:p>
-        </p:txBody>
-      </p:sp>
-      <p:sp>
-        <p:nvSpPr>
-          <p:cNvPr id="28" name="TextBox 27"/>
-          <p:cNvSpPr txBox="1"/>
-          <p:nvPr/>
-        </p:nvSpPr>
-        <p:spPr>
-          <a:xfrm>
-            <a:off x="10515600" y="6446520"/>
-            <a:ext cx="1005840" cy="228600"/>
-          </a:xfrm>
-          <a:prstGeom prst="rect">
-            <a:avLst/>
-          </a:prstGeom>
-          <a:noFill/>
-        </p:spPr>
-        <p:txBody>
-          <a:bodyPr wrap="square" anchor="t" lIns="0" rIns="0" tIns="0" bIns="0">
-            <a:spAutoFit/>
-          </a:bodyPr>
-          <a:lstStyle/>
-          <a:p>
-            <a:pPr algn="r">
-              <a:lnSpc>
-                <a:spcPct val="130000"/>
-              </a:lnSpc>
-            </a:pPr>
-            <a:r>
-              <a:rPr sz="900" b="0" i="0">
-                <a:solidFill>
-                  <a:srgbClr val="87867F"/>
-                </a:solidFill>
-                <a:latin typeface="PT Sans"/>
-              </a:rPr>
-              <a:t>16 / 18</a:t>
-            </a:r>
-          </a:p>
-        </p:txBody>
-      </p:sp>
-      <p:sp>
-        <p:nvSpPr>
-          <p:cNvPr id="29" name="TextBox 28"/>
-          <p:cNvSpPr txBox="1"/>
-          <p:nvPr/>
-        </p:nvSpPr>
-        <p:spPr>
-          <a:xfrm>
-            <a:off x="10515600" y="6446520"/>
-            <a:ext cx="365760" cy="228600"/>
+            <a:off x="11155680" y="6446520"/>
+            <a:ext cx="640080" cy="228600"/>
           </a:xfrm>
           <a:prstGeom prst="rect">
             <a:avLst/>
@@ -11369,86 +10823,8 @@
         </p:nvSpPr>
         <p:spPr>
           <a:xfrm>
-            <a:off x="658368" y="6446520"/>
-            <a:ext cx="7315200" cy="228600"/>
-          </a:xfrm>
-          <a:prstGeom prst="rect">
-            <a:avLst/>
-          </a:prstGeom>
-          <a:noFill/>
-        </p:spPr>
-        <p:txBody>
-          <a:bodyPr wrap="square" anchor="t" lIns="0" rIns="0" tIns="0" bIns="0">
-            <a:spAutoFit/>
-          </a:bodyPr>
-          <a:lstStyle/>
-          <a:p>
-            <a:pPr algn="l">
-              <a:lnSpc>
-                <a:spcPct val="130000"/>
-              </a:lnSpc>
-            </a:pPr>
-            <a:r>
-              <a:rPr sz="900" b="0" i="0">
-                <a:solidFill>
-                  <a:srgbClr val="87867F"/>
-                </a:solidFill>
-                <a:latin typeface="PT Sans"/>
-              </a:rPr>
-              <a:t>Доклад, вывод 1, раздел 17.12</a:t>
-            </a:r>
-          </a:p>
-        </p:txBody>
-      </p:sp>
-      <p:sp>
-        <p:nvSpPr>
-          <p:cNvPr id="19" name="TextBox 18"/>
-          <p:cNvSpPr txBox="1"/>
-          <p:nvPr/>
-        </p:nvSpPr>
-        <p:spPr>
-          <a:xfrm>
-            <a:off x="10515600" y="6446520"/>
-            <a:ext cx="1005840" cy="228600"/>
-          </a:xfrm>
-          <a:prstGeom prst="rect">
-            <a:avLst/>
-          </a:prstGeom>
-          <a:noFill/>
-        </p:spPr>
-        <p:txBody>
-          <a:bodyPr wrap="square" anchor="t" lIns="0" rIns="0" tIns="0" bIns="0">
-            <a:spAutoFit/>
-          </a:bodyPr>
-          <a:lstStyle/>
-          <a:p>
-            <a:pPr algn="r">
-              <a:lnSpc>
-                <a:spcPct val="130000"/>
-              </a:lnSpc>
-            </a:pPr>
-            <a:r>
-              <a:rPr sz="900" b="0" i="0">
-                <a:solidFill>
-                  <a:srgbClr val="87867F"/>
-                </a:solidFill>
-                <a:latin typeface="PT Sans"/>
-              </a:rPr>
-              <a:t>17 / 18</a:t>
-            </a:r>
-          </a:p>
-        </p:txBody>
-      </p:sp>
-      <p:sp>
-        <p:nvSpPr>
-          <p:cNvPr id="20" name="TextBox 19"/>
-          <p:cNvSpPr txBox="1"/>
-          <p:nvPr/>
-        </p:nvSpPr>
-        <p:spPr>
-          <a:xfrm>
-            <a:off x="10515600" y="6446520"/>
-            <a:ext cx="365760" cy="228600"/>
+            <a:off x="11155680" y="6446520"/>
+            <a:ext cx="640080" cy="228600"/>
           </a:xfrm>
           <a:prstGeom prst="rect">
             <a:avLst/>
@@ -12066,86 +11442,8 @@
         </p:nvSpPr>
         <p:spPr>
           <a:xfrm>
-            <a:off x="658368" y="6492240"/>
-            <a:ext cx="9144000" cy="228600"/>
-          </a:xfrm>
-          <a:prstGeom prst="rect">
-            <a:avLst/>
-          </a:prstGeom>
-          <a:noFill/>
-        </p:spPr>
-        <p:txBody>
-          <a:bodyPr wrap="square" anchor="t" lIns="0" rIns="0" tIns="0" bIns="0">
-            <a:spAutoFit/>
-          </a:bodyPr>
-          <a:lstStyle/>
-          <a:p>
-            <a:pPr algn="l">
-              <a:lnSpc>
-                <a:spcPct val="130000"/>
-              </a:lnSpc>
-            </a:pPr>
-            <a:r>
-              <a:rPr sz="900" b="0" i="0">
-                <a:solidFill>
-                  <a:srgbClr val="B7AFA0"/>
-                </a:solidFill>
-                <a:latin typeface="PT Sans"/>
-              </a:rPr>
-              <a:t>Доклад, раздел 35 (пилот), 22 (панель чисел)</a:t>
-            </a:r>
-          </a:p>
-        </p:txBody>
-      </p:sp>
-      <p:sp>
-        <p:nvSpPr>
-          <p:cNvPr id="17" name="TextBox 16"/>
-          <p:cNvSpPr txBox="1"/>
-          <p:nvPr/>
-        </p:nvSpPr>
-        <p:spPr>
-          <a:xfrm>
-            <a:off x="10515600" y="6492240"/>
-            <a:ext cx="1005840" cy="228600"/>
-          </a:xfrm>
-          <a:prstGeom prst="rect">
-            <a:avLst/>
-          </a:prstGeom>
-          <a:noFill/>
-        </p:spPr>
-        <p:txBody>
-          <a:bodyPr wrap="square" anchor="t" lIns="0" rIns="0" tIns="0" bIns="0">
-            <a:spAutoFit/>
-          </a:bodyPr>
-          <a:lstStyle/>
-          <a:p>
-            <a:pPr algn="r">
-              <a:lnSpc>
-                <a:spcPct val="130000"/>
-              </a:lnSpc>
-            </a:pPr>
-            <a:r>
-              <a:rPr sz="900" b="0" i="0">
-                <a:solidFill>
-                  <a:srgbClr val="B7AFA0"/>
-                </a:solidFill>
-                <a:latin typeface="PT Sans"/>
-              </a:rPr>
-              <a:t>18 / 18</a:t>
-            </a:r>
-          </a:p>
-        </p:txBody>
-      </p:sp>
-      <p:sp>
-        <p:nvSpPr>
-          <p:cNvPr id="18" name="TextBox 17"/>
-          <p:cNvSpPr txBox="1"/>
-          <p:nvPr/>
-        </p:nvSpPr>
-        <p:spPr>
-          <a:xfrm>
-            <a:off x="10515600" y="6492240"/>
-            <a:ext cx="274320" cy="228600"/>
+            <a:off x="11155680" y="6492240"/>
+            <a:ext cx="640080" cy="228600"/>
           </a:xfrm>
           <a:prstGeom prst="rect">
             <a:avLst/>
@@ -12667,86 +11965,8 @@
         </p:nvSpPr>
         <p:spPr>
           <a:xfrm>
-            <a:off x="658368" y="6446520"/>
-            <a:ext cx="7315200" cy="228600"/>
-          </a:xfrm>
-          <a:prstGeom prst="rect">
-            <a:avLst/>
-          </a:prstGeom>
-          <a:noFill/>
-        </p:spPr>
-        <p:txBody>
-          <a:bodyPr wrap="square" anchor="t" lIns="0" rIns="0" tIns="0" bIns="0">
-            <a:spAutoFit/>
-          </a:bodyPr>
-          <a:lstStyle/>
-          <a:p>
-            <a:pPr algn="l">
-              <a:lnSpc>
-                <a:spcPct val="130000"/>
-              </a:lnSpc>
-            </a:pPr>
-            <a:r>
-              <a:rPr sz="900" b="0" i="0">
-                <a:solidFill>
-                  <a:srgbClr val="87867F"/>
-                </a:solidFill>
-                <a:latin typeface="PT Sans"/>
-              </a:rPr>
-              <a:t>Приложение после финального слайда</a:t>
-            </a:r>
-          </a:p>
-        </p:txBody>
-      </p:sp>
-      <p:sp>
-        <p:nvSpPr>
-          <p:cNvPr id="11" name="TextBox 10"/>
-          <p:cNvSpPr txBox="1"/>
-          <p:nvPr/>
-        </p:nvSpPr>
-        <p:spPr>
-          <a:xfrm>
-            <a:off x="10515600" y="6446520"/>
-            <a:ext cx="1005840" cy="228600"/>
-          </a:xfrm>
-          <a:prstGeom prst="rect">
-            <a:avLst/>
-          </a:prstGeom>
-          <a:noFill/>
-        </p:spPr>
-        <p:txBody>
-          <a:bodyPr wrap="square" anchor="t" lIns="0" rIns="0" tIns="0" bIns="0">
-            <a:spAutoFit/>
-          </a:bodyPr>
-          <a:lstStyle/>
-          <a:p>
-            <a:pPr algn="r">
-              <a:lnSpc>
-                <a:spcPct val="130000"/>
-              </a:lnSpc>
-            </a:pPr>
-            <a:r>
-              <a:rPr sz="900" b="0" i="0">
-                <a:solidFill>
-                  <a:srgbClr val="87867F"/>
-                </a:solidFill>
-                <a:latin typeface="PT Sans"/>
-              </a:rPr>
-              <a:t>— / —</a:t>
-            </a:r>
-          </a:p>
-        </p:txBody>
-      </p:sp>
-      <p:sp>
-        <p:nvSpPr>
-          <p:cNvPr id="12" name="TextBox 11"/>
-          <p:cNvSpPr txBox="1"/>
-          <p:nvPr/>
-        </p:nvSpPr>
-        <p:spPr>
-          <a:xfrm>
-            <a:off x="10515600" y="6446520"/>
-            <a:ext cx="365760" cy="228600"/>
+            <a:off x="11155680" y="6446520"/>
+            <a:ext cx="640080" cy="228600"/>
           </a:xfrm>
           <a:prstGeom prst="rect">
             <a:avLst/>
@@ -13815,86 +13035,8 @@
         </p:nvSpPr>
         <p:spPr>
           <a:xfrm>
-            <a:off x="658368" y="6446520"/>
-            <a:ext cx="7315200" cy="228600"/>
-          </a:xfrm>
-          <a:prstGeom prst="rect">
-            <a:avLst/>
-          </a:prstGeom>
-          <a:noFill/>
-        </p:spPr>
-        <p:txBody>
-          <a:bodyPr wrap="square" anchor="t" lIns="0" rIns="0" tIns="0" bIns="0">
-            <a:spAutoFit/>
-          </a:bodyPr>
-          <a:lstStyle/>
-          <a:p>
-            <a:pPr algn="l">
-              <a:lnSpc>
-                <a:spcPct val="130000"/>
-              </a:lnSpc>
-            </a:pPr>
-            <a:r>
-              <a:rPr sz="900" b="0" i="0">
-                <a:solidFill>
-                  <a:srgbClr val="87867F"/>
-                </a:solidFill>
-                <a:latin typeface="PT Sans"/>
-              </a:rPr>
-              <a:t>Доклад, разделы 4–8; сценарий 0:00–2:00</a:t>
-            </a:r>
-          </a:p>
-        </p:txBody>
-      </p:sp>
-      <p:sp>
-        <p:nvSpPr>
-          <p:cNvPr id="28" name="TextBox 27"/>
-          <p:cNvSpPr txBox="1"/>
-          <p:nvPr/>
-        </p:nvSpPr>
-        <p:spPr>
-          <a:xfrm>
-            <a:off x="10515600" y="6446520"/>
-            <a:ext cx="1005840" cy="228600"/>
-          </a:xfrm>
-          <a:prstGeom prst="rect">
-            <a:avLst/>
-          </a:prstGeom>
-          <a:noFill/>
-        </p:spPr>
-        <p:txBody>
-          <a:bodyPr wrap="square" anchor="t" lIns="0" rIns="0" tIns="0" bIns="0">
-            <a:spAutoFit/>
-          </a:bodyPr>
-          <a:lstStyle/>
-          <a:p>
-            <a:pPr algn="r">
-              <a:lnSpc>
-                <a:spcPct val="130000"/>
-              </a:lnSpc>
-            </a:pPr>
-            <a:r>
-              <a:rPr sz="900" b="0" i="0">
-                <a:solidFill>
-                  <a:srgbClr val="87867F"/>
-                </a:solidFill>
-                <a:latin typeface="PT Sans"/>
-              </a:rPr>
-              <a:t>2 / 18</a:t>
-            </a:r>
-          </a:p>
-        </p:txBody>
-      </p:sp>
-      <p:sp>
-        <p:nvSpPr>
-          <p:cNvPr id="29" name="TextBox 28"/>
-          <p:cNvSpPr txBox="1"/>
-          <p:nvPr/>
-        </p:nvSpPr>
-        <p:spPr>
-          <a:xfrm>
-            <a:off x="10515600" y="6446520"/>
-            <a:ext cx="365760" cy="228600"/>
+            <a:off x="11155680" y="6446520"/>
+            <a:ext cx="640080" cy="228600"/>
           </a:xfrm>
           <a:prstGeom prst="rect">
             <a:avLst/>
@@ -14315,86 +13457,8 @@
         </p:nvSpPr>
         <p:spPr>
           <a:xfrm>
-            <a:off x="658368" y="6446520"/>
-            <a:ext cx="7315200" cy="228600"/>
-          </a:xfrm>
-          <a:prstGeom prst="rect">
-            <a:avLst/>
-          </a:prstGeom>
-          <a:noFill/>
-        </p:spPr>
-        <p:txBody>
-          <a:bodyPr wrap="square" anchor="t" lIns="0" rIns="0" tIns="0" bIns="0">
-            <a:spAutoFit/>
-          </a:bodyPr>
-          <a:lstStyle/>
-          <a:p>
-            <a:pPr algn="l">
-              <a:lnSpc>
-                <a:spcPct val="130000"/>
-              </a:lnSpc>
-            </a:pPr>
-            <a:r>
-              <a:rPr sz="900" b="0" i="0">
-                <a:solidFill>
-                  <a:srgbClr val="87867F"/>
-                </a:solidFill>
-                <a:latin typeface="PT Sans"/>
-              </a:rPr>
-              <a:t>Вопрос залу</a:t>
-            </a:r>
-          </a:p>
-        </p:txBody>
-      </p:sp>
-      <p:sp>
-        <p:nvSpPr>
-          <p:cNvPr id="12" name="TextBox 11"/>
-          <p:cNvSpPr txBox="1"/>
-          <p:nvPr/>
-        </p:nvSpPr>
-        <p:spPr>
-          <a:xfrm>
-            <a:off x="10515600" y="6446520"/>
-            <a:ext cx="1005840" cy="228600"/>
-          </a:xfrm>
-          <a:prstGeom prst="rect">
-            <a:avLst/>
-          </a:prstGeom>
-          <a:noFill/>
-        </p:spPr>
-        <p:txBody>
-          <a:bodyPr wrap="square" anchor="t" lIns="0" rIns="0" tIns="0" bIns="0">
-            <a:spAutoFit/>
-          </a:bodyPr>
-          <a:lstStyle/>
-          <a:p>
-            <a:pPr algn="r">
-              <a:lnSpc>
-                <a:spcPct val="130000"/>
-              </a:lnSpc>
-            </a:pPr>
-            <a:r>
-              <a:rPr sz="900" b="0" i="0">
-                <a:solidFill>
-                  <a:srgbClr val="87867F"/>
-                </a:solidFill>
-                <a:latin typeface="PT Sans"/>
-              </a:rPr>
-              <a:t>R1</a:t>
-            </a:r>
-          </a:p>
-        </p:txBody>
-      </p:sp>
-      <p:sp>
-        <p:nvSpPr>
-          <p:cNvPr id="13" name="TextBox 12"/>
-          <p:cNvSpPr txBox="1"/>
-          <p:nvPr/>
-        </p:nvSpPr>
-        <p:spPr>
-          <a:xfrm>
-            <a:off x="10515600" y="6446520"/>
-            <a:ext cx="274320" cy="228600"/>
+            <a:off x="10972800" y="6446520"/>
+            <a:ext cx="822960" cy="228600"/>
           </a:xfrm>
           <a:prstGeom prst="rect">
             <a:avLst/>
@@ -15174,86 +14238,8 @@
         </p:nvSpPr>
         <p:spPr>
           <a:xfrm>
-            <a:off x="658368" y="6446520"/>
-            <a:ext cx="7315200" cy="228600"/>
-          </a:xfrm>
-          <a:prstGeom prst="rect">
-            <a:avLst/>
-          </a:prstGeom>
-          <a:noFill/>
-        </p:spPr>
-        <p:txBody>
-          <a:bodyPr wrap="square" anchor="t" lIns="0" rIns="0" tIns="0" bIns="0">
-            <a:spAutoFit/>
-          </a:bodyPr>
-          <a:lstStyle/>
-          <a:p>
-            <a:pPr algn="l">
-              <a:lnSpc>
-                <a:spcPct val="130000"/>
-              </a:lnSpc>
-            </a:pPr>
-            <a:r>
-              <a:rPr sz="900" b="0" i="0">
-                <a:solidFill>
-                  <a:srgbClr val="87867F"/>
-                </a:solidFill>
-                <a:latin typeface="PT Sans"/>
-              </a:rPr>
-              <a:t>Программа организаторов; речь 0:00–2:00</a:t>
-            </a:r>
-          </a:p>
-        </p:txBody>
-      </p:sp>
-      <p:sp>
-        <p:nvSpPr>
-          <p:cNvPr id="21" name="TextBox 20"/>
-          <p:cNvSpPr txBox="1"/>
-          <p:nvPr/>
-        </p:nvSpPr>
-        <p:spPr>
-          <a:xfrm>
-            <a:off x="10515600" y="6446520"/>
-            <a:ext cx="1005840" cy="228600"/>
-          </a:xfrm>
-          <a:prstGeom prst="rect">
-            <a:avLst/>
-          </a:prstGeom>
-          <a:noFill/>
-        </p:spPr>
-        <p:txBody>
-          <a:bodyPr wrap="square" anchor="t" lIns="0" rIns="0" tIns="0" bIns="0">
-            <a:spAutoFit/>
-          </a:bodyPr>
-          <a:lstStyle/>
-          <a:p>
-            <a:pPr algn="r">
-              <a:lnSpc>
-                <a:spcPct val="130000"/>
-              </a:lnSpc>
-            </a:pPr>
-            <a:r>
-              <a:rPr sz="900" b="0" i="0">
-                <a:solidFill>
-                  <a:srgbClr val="87867F"/>
-                </a:solidFill>
-                <a:latin typeface="PT Sans"/>
-              </a:rPr>
-              <a:t>R2</a:t>
-            </a:r>
-          </a:p>
-        </p:txBody>
-      </p:sp>
-      <p:sp>
-        <p:nvSpPr>
-          <p:cNvPr id="22" name="TextBox 21"/>
-          <p:cNvSpPr txBox="1"/>
-          <p:nvPr/>
-        </p:nvSpPr>
-        <p:spPr>
-          <a:xfrm>
-            <a:off x="10515600" y="6446520"/>
-            <a:ext cx="274320" cy="228600"/>
+            <a:off x="10972800" y="6446520"/>
+            <a:ext cx="822960" cy="228600"/>
           </a:xfrm>
           <a:prstGeom prst="rect">
             <a:avLst/>
@@ -15773,86 +14759,8 @@
         </p:nvSpPr>
         <p:spPr>
           <a:xfrm>
-            <a:off x="658368" y="6446520"/>
-            <a:ext cx="7315200" cy="228600"/>
-          </a:xfrm>
-          <a:prstGeom prst="rect">
-            <a:avLst/>
-          </a:prstGeom>
-          <a:noFill/>
-        </p:spPr>
-        <p:txBody>
-          <a:bodyPr wrap="square" anchor="t" lIns="0" rIns="0" tIns="0" bIns="0">
-            <a:spAutoFit/>
-          </a:bodyPr>
-          <a:lstStyle/>
-          <a:p>
-            <a:pPr algn="l">
-              <a:lnSpc>
-                <a:spcPct val="130000"/>
-              </a:lnSpc>
-            </a:pPr>
-            <a:r>
-              <a:rPr sz="900" b="0" i="0">
-                <a:solidFill>
-                  <a:srgbClr val="87867F"/>
-                </a:solidFill>
-                <a:latin typeface="PT Sans"/>
-              </a:rPr>
-              <a:t>Доклад, раздел 25, лестница М0–М5</a:t>
-            </a:r>
-          </a:p>
-        </p:txBody>
-      </p:sp>
-      <p:sp>
-        <p:nvSpPr>
-          <p:cNvPr id="13" name="TextBox 12"/>
-          <p:cNvSpPr txBox="1"/>
-          <p:nvPr/>
-        </p:nvSpPr>
-        <p:spPr>
-          <a:xfrm>
-            <a:off x="10515600" y="6446520"/>
-            <a:ext cx="1005840" cy="228600"/>
-          </a:xfrm>
-          <a:prstGeom prst="rect">
-            <a:avLst/>
-          </a:prstGeom>
-          <a:noFill/>
-        </p:spPr>
-        <p:txBody>
-          <a:bodyPr wrap="square" anchor="t" lIns="0" rIns="0" tIns="0" bIns="0">
-            <a:spAutoFit/>
-          </a:bodyPr>
-          <a:lstStyle/>
-          <a:p>
-            <a:pPr algn="r">
-              <a:lnSpc>
-                <a:spcPct val="130000"/>
-              </a:lnSpc>
-            </a:pPr>
-            <a:r>
-              <a:rPr sz="900" b="0" i="0">
-                <a:solidFill>
-                  <a:srgbClr val="87867F"/>
-                </a:solidFill>
-                <a:latin typeface="PT Sans"/>
-              </a:rPr>
-              <a:t>R3</a:t>
-            </a:r>
-          </a:p>
-        </p:txBody>
-      </p:sp>
-      <p:sp>
-        <p:nvSpPr>
-          <p:cNvPr id="14" name="TextBox 13"/>
-          <p:cNvSpPr txBox="1"/>
-          <p:nvPr/>
-        </p:nvSpPr>
-        <p:spPr>
-          <a:xfrm>
-            <a:off x="10515600" y="6446520"/>
-            <a:ext cx="274320" cy="228600"/>
+            <a:off x="10972800" y="6446520"/>
+            <a:ext cx="822960" cy="228600"/>
           </a:xfrm>
           <a:prstGeom prst="rect">
             <a:avLst/>
@@ -16317,86 +15225,8 @@
         </p:nvSpPr>
         <p:spPr>
           <a:xfrm>
-            <a:off x="658368" y="6446520"/>
-            <a:ext cx="7315200" cy="228600"/>
-          </a:xfrm>
-          <a:prstGeom prst="rect">
-            <a:avLst/>
-          </a:prstGeom>
-          <a:noFill/>
-        </p:spPr>
-        <p:txBody>
-          <a:bodyPr wrap="square" anchor="t" lIns="0" rIns="0" tIns="0" bIns="0">
-            <a:spAutoFit/>
-          </a:bodyPr>
-          <a:lstStyle/>
-          <a:p>
-            <a:pPr algn="l">
-              <a:lnSpc>
-                <a:spcPct val="130000"/>
-              </a:lnSpc>
-            </a:pPr>
-            <a:r>
-              <a:rPr sz="900" b="0" i="0">
-                <a:solidFill>
-                  <a:srgbClr val="87867F"/>
-                </a:solidFill>
-                <a:latin typeface="PT Sans"/>
-              </a:rPr>
-              <a:t>Доклад, раздел 25, лестница М0–М5</a:t>
-            </a:r>
-          </a:p>
-        </p:txBody>
-      </p:sp>
-      <p:sp>
-        <p:nvSpPr>
-          <p:cNvPr id="12" name="TextBox 11"/>
-          <p:cNvSpPr txBox="1"/>
-          <p:nvPr/>
-        </p:nvSpPr>
-        <p:spPr>
-          <a:xfrm>
-            <a:off x="10515600" y="6446520"/>
-            <a:ext cx="1005840" cy="228600"/>
-          </a:xfrm>
-          <a:prstGeom prst="rect">
-            <a:avLst/>
-          </a:prstGeom>
-          <a:noFill/>
-        </p:spPr>
-        <p:txBody>
-          <a:bodyPr wrap="square" anchor="t" lIns="0" rIns="0" tIns="0" bIns="0">
-            <a:spAutoFit/>
-          </a:bodyPr>
-          <a:lstStyle/>
-          <a:p>
-            <a:pPr algn="r">
-              <a:lnSpc>
-                <a:spcPct val="130000"/>
-              </a:lnSpc>
-            </a:pPr>
-            <a:r>
-              <a:rPr sz="900" b="0" i="0">
-                <a:solidFill>
-                  <a:srgbClr val="87867F"/>
-                </a:solidFill>
-                <a:latin typeface="PT Sans"/>
-              </a:rPr>
-              <a:t>R4</a:t>
-            </a:r>
-          </a:p>
-        </p:txBody>
-      </p:sp>
-      <p:sp>
-        <p:nvSpPr>
-          <p:cNvPr id="13" name="TextBox 12"/>
-          <p:cNvSpPr txBox="1"/>
-          <p:nvPr/>
-        </p:nvSpPr>
-        <p:spPr>
-          <a:xfrm>
-            <a:off x="10515600" y="6446520"/>
-            <a:ext cx="274320" cy="228600"/>
+            <a:off x="10972800" y="6446520"/>
+            <a:ext cx="822960" cy="228600"/>
           </a:xfrm>
           <a:prstGeom prst="rect">
             <a:avLst/>
@@ -16861,86 +15691,8 @@
         </p:nvSpPr>
         <p:spPr>
           <a:xfrm>
-            <a:off x="658368" y="6446520"/>
-            <a:ext cx="7315200" cy="228600"/>
-          </a:xfrm>
-          <a:prstGeom prst="rect">
-            <a:avLst/>
-          </a:prstGeom>
-          <a:noFill/>
-        </p:spPr>
-        <p:txBody>
-          <a:bodyPr wrap="square" anchor="t" lIns="0" rIns="0" tIns="0" bIns="0">
-            <a:spAutoFit/>
-          </a:bodyPr>
-          <a:lstStyle/>
-          <a:p>
-            <a:pPr algn="l">
-              <a:lnSpc>
-                <a:spcPct val="130000"/>
-              </a:lnSpc>
-            </a:pPr>
-            <a:r>
-              <a:rPr sz="900" b="0" i="0">
-                <a:solidFill>
-                  <a:srgbClr val="87867F"/>
-                </a:solidFill>
-                <a:latin typeface="PT Sans"/>
-              </a:rPr>
-              <a:t>Доклад, раздел 25</a:t>
-            </a:r>
-          </a:p>
-        </p:txBody>
-      </p:sp>
-      <p:sp>
-        <p:nvSpPr>
-          <p:cNvPr id="12" name="TextBox 11"/>
-          <p:cNvSpPr txBox="1"/>
-          <p:nvPr/>
-        </p:nvSpPr>
-        <p:spPr>
-          <a:xfrm>
-            <a:off x="10515600" y="6446520"/>
-            <a:ext cx="1005840" cy="228600"/>
-          </a:xfrm>
-          <a:prstGeom prst="rect">
-            <a:avLst/>
-          </a:prstGeom>
-          <a:noFill/>
-        </p:spPr>
-        <p:txBody>
-          <a:bodyPr wrap="square" anchor="t" lIns="0" rIns="0" tIns="0" bIns="0">
-            <a:spAutoFit/>
-          </a:bodyPr>
-          <a:lstStyle/>
-          <a:p>
-            <a:pPr algn="r">
-              <a:lnSpc>
-                <a:spcPct val="130000"/>
-              </a:lnSpc>
-            </a:pPr>
-            <a:r>
-              <a:rPr sz="900" b="0" i="0">
-                <a:solidFill>
-                  <a:srgbClr val="87867F"/>
-                </a:solidFill>
-                <a:latin typeface="PT Sans"/>
-              </a:rPr>
-              <a:t>R5</a:t>
-            </a:r>
-          </a:p>
-        </p:txBody>
-      </p:sp>
-      <p:sp>
-        <p:nvSpPr>
-          <p:cNvPr id="13" name="TextBox 12"/>
-          <p:cNvSpPr txBox="1"/>
-          <p:nvPr/>
-        </p:nvSpPr>
-        <p:spPr>
-          <a:xfrm>
-            <a:off x="10515600" y="6446520"/>
-            <a:ext cx="274320" cy="228600"/>
+            <a:off x="10972800" y="6446520"/>
+            <a:ext cx="822960" cy="228600"/>
           </a:xfrm>
           <a:prstGeom prst="rect">
             <a:avLst/>
@@ -17512,86 +16264,8 @@
         </p:nvSpPr>
         <p:spPr>
           <a:xfrm>
-            <a:off x="658368" y="6446520"/>
-            <a:ext cx="7315200" cy="228600"/>
-          </a:xfrm>
-          <a:prstGeom prst="rect">
-            <a:avLst/>
-          </a:prstGeom>
-          <a:noFill/>
-        </p:spPr>
-        <p:txBody>
-          <a:bodyPr wrap="square" anchor="t" lIns="0" rIns="0" tIns="0" bIns="0">
-            <a:spAutoFit/>
-          </a:bodyPr>
-          <a:lstStyle/>
-          <a:p>
-            <a:pPr algn="l">
-              <a:lnSpc>
-                <a:spcPct val="130000"/>
-              </a:lnSpc>
-            </a:pPr>
-            <a:r>
-              <a:rPr sz="900" b="0" i="0">
-                <a:solidFill>
-                  <a:srgbClr val="87867F"/>
-                </a:solidFill>
-                <a:latin typeface="PT Sans"/>
-              </a:rPr>
-              <a:t>Доклад, раздел 25, 29</a:t>
-            </a:r>
-          </a:p>
-        </p:txBody>
-      </p:sp>
-      <p:sp>
-        <p:nvSpPr>
-          <p:cNvPr id="15" name="TextBox 14"/>
-          <p:cNvSpPr txBox="1"/>
-          <p:nvPr/>
-        </p:nvSpPr>
-        <p:spPr>
-          <a:xfrm>
-            <a:off x="10515600" y="6446520"/>
-            <a:ext cx="1005840" cy="228600"/>
-          </a:xfrm>
-          <a:prstGeom prst="rect">
-            <a:avLst/>
-          </a:prstGeom>
-          <a:noFill/>
-        </p:spPr>
-        <p:txBody>
-          <a:bodyPr wrap="square" anchor="t" lIns="0" rIns="0" tIns="0" bIns="0">
-            <a:spAutoFit/>
-          </a:bodyPr>
-          <a:lstStyle/>
-          <a:p>
-            <a:pPr algn="r">
-              <a:lnSpc>
-                <a:spcPct val="130000"/>
-              </a:lnSpc>
-            </a:pPr>
-            <a:r>
-              <a:rPr sz="900" b="0" i="0">
-                <a:solidFill>
-                  <a:srgbClr val="87867F"/>
-                </a:solidFill>
-                <a:latin typeface="PT Sans"/>
-              </a:rPr>
-              <a:t>R6</a:t>
-            </a:r>
-          </a:p>
-        </p:txBody>
-      </p:sp>
-      <p:sp>
-        <p:nvSpPr>
-          <p:cNvPr id="16" name="TextBox 15"/>
-          <p:cNvSpPr txBox="1"/>
-          <p:nvPr/>
-        </p:nvSpPr>
-        <p:spPr>
-          <a:xfrm>
-            <a:off x="10515600" y="6446520"/>
-            <a:ext cx="274320" cy="228600"/>
+            <a:off x="10972800" y="6446520"/>
+            <a:ext cx="822960" cy="228600"/>
           </a:xfrm>
           <a:prstGeom prst="rect">
             <a:avLst/>
@@ -19281,86 +17955,8 @@
         </p:nvSpPr>
         <p:spPr>
           <a:xfrm>
-            <a:off x="658368" y="6446520"/>
-            <a:ext cx="7315200" cy="228600"/>
-          </a:xfrm>
-          <a:prstGeom prst="rect">
-            <a:avLst/>
-          </a:prstGeom>
-          <a:noFill/>
-        </p:spPr>
-        <p:txBody>
-          <a:bodyPr wrap="square" anchor="t" lIns="0" rIns="0" tIns="0" bIns="0">
-            <a:spAutoFit/>
-          </a:bodyPr>
-          <a:lstStyle/>
-          <a:p>
-            <a:pPr algn="l">
-              <a:lnSpc>
-                <a:spcPct val="130000"/>
-              </a:lnSpc>
-            </a:pPr>
-            <a:r>
-              <a:rPr sz="900" b="0" i="0">
-                <a:solidFill>
-                  <a:srgbClr val="87867F"/>
-                </a:solidFill>
-                <a:latin typeface="PT Sans"/>
-              </a:rPr>
-              <a:t>Доклад, раздел 10  ·  IDDSI — не протокол лечения</a:t>
-            </a:r>
-          </a:p>
-        </p:txBody>
-      </p:sp>
-      <p:sp>
-        <p:nvSpPr>
-          <p:cNvPr id="43" name="TextBox 42"/>
-          <p:cNvSpPr txBox="1"/>
-          <p:nvPr/>
-        </p:nvSpPr>
-        <p:spPr>
-          <a:xfrm>
-            <a:off x="10515600" y="6446520"/>
-            <a:ext cx="1005840" cy="228600"/>
-          </a:xfrm>
-          <a:prstGeom prst="rect">
-            <a:avLst/>
-          </a:prstGeom>
-          <a:noFill/>
-        </p:spPr>
-        <p:txBody>
-          <a:bodyPr wrap="square" anchor="t" lIns="0" rIns="0" tIns="0" bIns="0">
-            <a:spAutoFit/>
-          </a:bodyPr>
-          <a:lstStyle/>
-          <a:p>
-            <a:pPr algn="r">
-              <a:lnSpc>
-                <a:spcPct val="130000"/>
-              </a:lnSpc>
-            </a:pPr>
-            <a:r>
-              <a:rPr sz="900" b="0" i="0">
-                <a:solidFill>
-                  <a:srgbClr val="87867F"/>
-                </a:solidFill>
-                <a:latin typeface="PT Sans"/>
-              </a:rPr>
-              <a:t>R7</a:t>
-            </a:r>
-          </a:p>
-        </p:txBody>
-      </p:sp>
-      <p:sp>
-        <p:nvSpPr>
-          <p:cNvPr id="44" name="TextBox 43"/>
-          <p:cNvSpPr txBox="1"/>
-          <p:nvPr/>
-        </p:nvSpPr>
-        <p:spPr>
-          <a:xfrm>
-            <a:off x="10515600" y="6446520"/>
-            <a:ext cx="274320" cy="228600"/>
+            <a:off x="10972800" y="6446520"/>
+            <a:ext cx="822960" cy="228600"/>
           </a:xfrm>
           <a:prstGeom prst="rect">
             <a:avLst/>
@@ -19686,7 +18282,7 @@
                 </a:solidFill>
                 <a:latin typeface="Playfair Display"/>
               </a:rPr>
-              <a:t>3185-1 ст. 5, 37, 43</a:t>
+              <a:t>3185-1 ст. 5 ч. 2; ст. 37, 43</a:t>
             </a:r>
           </a:p>
         </p:txBody>
@@ -19764,7 +18360,7 @@
                 </a:solidFill>
                 <a:latin typeface="PT Sans"/>
               </a:rPr>
-              <a:t>Гуманное отношение, достоинство; права пациентов; статус проживающих в стационарных организациях соцобслуживания.</a:t>
+              <a:t>Гуманное отношение — ст. 5 ч. 2, не ст. 37 ч. 2. Ст. 37 и 43 — права пациентов и статус проживающих.</a:t>
             </a:r>
           </a:p>
         </p:txBody>
@@ -20380,86 +18976,8 @@
         </p:nvSpPr>
         <p:spPr>
           <a:xfrm>
-            <a:off x="658368" y="6446520"/>
-            <a:ext cx="7315200" cy="228600"/>
-          </a:xfrm>
-          <a:prstGeom prst="rect">
-            <a:avLst/>
-          </a:prstGeom>
-          <a:noFill/>
-        </p:spPr>
-        <p:txBody>
-          <a:bodyPr wrap="square" anchor="t" lIns="0" rIns="0" tIns="0" bIns="0">
-            <a:spAutoFit/>
-          </a:bodyPr>
-          <a:lstStyle/>
-          <a:p>
-            <a:pPr algn="l">
-              <a:lnSpc>
-                <a:spcPct val="130000"/>
-              </a:lnSpc>
-            </a:pPr>
-            <a:r>
-              <a:rPr sz="900" b="0" i="0">
-                <a:solidFill>
-                  <a:srgbClr val="87867F"/>
-                </a:solidFill>
-                <a:latin typeface="PT Sans"/>
-              </a:rPr>
-              <a:t>Доклад, раздел 17, 17.12</a:t>
-            </a:r>
-          </a:p>
-        </p:txBody>
-      </p:sp>
-      <p:sp>
-        <p:nvSpPr>
-          <p:cNvPr id="27" name="TextBox 26"/>
-          <p:cNvSpPr txBox="1"/>
-          <p:nvPr/>
-        </p:nvSpPr>
-        <p:spPr>
-          <a:xfrm>
-            <a:off x="10515600" y="6446520"/>
-            <a:ext cx="1005840" cy="228600"/>
-          </a:xfrm>
-          <a:prstGeom prst="rect">
-            <a:avLst/>
-          </a:prstGeom>
-          <a:noFill/>
-        </p:spPr>
-        <p:txBody>
-          <a:bodyPr wrap="square" anchor="t" lIns="0" rIns="0" tIns="0" bIns="0">
-            <a:spAutoFit/>
-          </a:bodyPr>
-          <a:lstStyle/>
-          <a:p>
-            <a:pPr algn="r">
-              <a:lnSpc>
-                <a:spcPct val="130000"/>
-              </a:lnSpc>
-            </a:pPr>
-            <a:r>
-              <a:rPr sz="900" b="0" i="0">
-                <a:solidFill>
-                  <a:srgbClr val="87867F"/>
-                </a:solidFill>
-                <a:latin typeface="PT Sans"/>
-              </a:rPr>
-              <a:t>R8</a:t>
-            </a:r>
-          </a:p>
-        </p:txBody>
-      </p:sp>
-      <p:sp>
-        <p:nvSpPr>
-          <p:cNvPr id="28" name="TextBox 27"/>
-          <p:cNvSpPr txBox="1"/>
-          <p:nvPr/>
-        </p:nvSpPr>
-        <p:spPr>
-          <a:xfrm>
-            <a:off x="10515600" y="6446520"/>
-            <a:ext cx="274320" cy="228600"/>
+            <a:off x="10972800" y="6446520"/>
+            <a:ext cx="822960" cy="228600"/>
           </a:xfrm>
           <a:prstGeom prst="rect">
             <a:avLst/>
@@ -21368,86 +19886,8 @@
         </p:nvSpPr>
         <p:spPr>
           <a:xfrm>
-            <a:off x="658368" y="6446520"/>
-            <a:ext cx="7315200" cy="228600"/>
-          </a:xfrm>
-          <a:prstGeom prst="rect">
-            <a:avLst/>
-          </a:prstGeom>
-          <a:noFill/>
-        </p:spPr>
-        <p:txBody>
-          <a:bodyPr wrap="square" anchor="t" lIns="0" rIns="0" tIns="0" bIns="0">
-            <a:spAutoFit/>
-          </a:bodyPr>
-          <a:lstStyle/>
-          <a:p>
-            <a:pPr algn="l">
-              <a:lnSpc>
-                <a:spcPct val="130000"/>
-              </a:lnSpc>
-            </a:pPr>
-            <a:r>
-              <a:rPr sz="900" b="0" i="0">
-                <a:solidFill>
-                  <a:srgbClr val="87867F"/>
-                </a:solidFill>
-                <a:latin typeface="PT Sans"/>
-              </a:rPr>
-              <a:t>Шаблон — проект, не норматив</a:t>
-            </a:r>
-          </a:p>
-        </p:txBody>
-      </p:sp>
-      <p:sp>
-        <p:nvSpPr>
-          <p:cNvPr id="24" name="TextBox 23"/>
-          <p:cNvSpPr txBox="1"/>
-          <p:nvPr/>
-        </p:nvSpPr>
-        <p:spPr>
-          <a:xfrm>
-            <a:off x="10515600" y="6446520"/>
-            <a:ext cx="1005840" cy="228600"/>
-          </a:xfrm>
-          <a:prstGeom prst="rect">
-            <a:avLst/>
-          </a:prstGeom>
-          <a:noFill/>
-        </p:spPr>
-        <p:txBody>
-          <a:bodyPr wrap="square" anchor="t" lIns="0" rIns="0" tIns="0" bIns="0">
-            <a:spAutoFit/>
-          </a:bodyPr>
-          <a:lstStyle/>
-          <a:p>
-            <a:pPr algn="r">
-              <a:lnSpc>
-                <a:spcPct val="130000"/>
-              </a:lnSpc>
-            </a:pPr>
-            <a:r>
-              <a:rPr sz="900" b="0" i="0">
-                <a:solidFill>
-                  <a:srgbClr val="87867F"/>
-                </a:solidFill>
-                <a:latin typeface="PT Sans"/>
-              </a:rPr>
-              <a:t>R9</a:t>
-            </a:r>
-          </a:p>
-        </p:txBody>
-      </p:sp>
-      <p:sp>
-        <p:nvSpPr>
-          <p:cNvPr id="25" name="TextBox 24"/>
-          <p:cNvSpPr txBox="1"/>
-          <p:nvPr/>
-        </p:nvSpPr>
-        <p:spPr>
-          <a:xfrm>
-            <a:off x="10515600" y="6446520"/>
-            <a:ext cx="274320" cy="228600"/>
+            <a:off x="10972800" y="6446520"/>
+            <a:ext cx="822960" cy="228600"/>
           </a:xfrm>
           <a:prstGeom prst="rect">
             <a:avLst/>
@@ -23793,86 +22233,8 @@
         </p:nvSpPr>
         <p:spPr>
           <a:xfrm>
-            <a:off x="658368" y="6446520"/>
-            <a:ext cx="7315200" cy="228600"/>
-          </a:xfrm>
-          <a:prstGeom prst="rect">
-            <a:avLst/>
-          </a:prstGeom>
-          <a:noFill/>
-        </p:spPr>
-        <p:txBody>
-          <a:bodyPr wrap="square" anchor="t" lIns="0" rIns="0" tIns="0" bIns="0">
-            <a:spAutoFit/>
-          </a:bodyPr>
-          <a:lstStyle/>
-          <a:p>
-            <a:pPr algn="l">
-              <a:lnSpc>
-                <a:spcPct val="130000"/>
-              </a:lnSpc>
-            </a:pPr>
-            <a:r>
-              <a:rPr sz="900" b="0" i="0">
-                <a:solidFill>
-                  <a:srgbClr val="87867F"/>
-                </a:solidFill>
-                <a:latin typeface="PT Sans"/>
-              </a:rPr>
-              <a:t>Тетрадный формат допустим на старте</a:t>
-            </a:r>
-          </a:p>
-        </p:txBody>
-      </p:sp>
-      <p:sp>
-        <p:nvSpPr>
-          <p:cNvPr id="57" name="TextBox 56"/>
-          <p:cNvSpPr txBox="1"/>
-          <p:nvPr/>
-        </p:nvSpPr>
-        <p:spPr>
-          <a:xfrm>
-            <a:off x="10515600" y="6446520"/>
-            <a:ext cx="1005840" cy="228600"/>
-          </a:xfrm>
-          <a:prstGeom prst="rect">
-            <a:avLst/>
-          </a:prstGeom>
-          <a:noFill/>
-        </p:spPr>
-        <p:txBody>
-          <a:bodyPr wrap="square" anchor="t" lIns="0" rIns="0" tIns="0" bIns="0">
-            <a:spAutoFit/>
-          </a:bodyPr>
-          <a:lstStyle/>
-          <a:p>
-            <a:pPr algn="r">
-              <a:lnSpc>
-                <a:spcPct val="130000"/>
-              </a:lnSpc>
-            </a:pPr>
-            <a:r>
-              <a:rPr sz="900" b="0" i="0">
-                <a:solidFill>
-                  <a:srgbClr val="87867F"/>
-                </a:solidFill>
-                <a:latin typeface="PT Sans"/>
-              </a:rPr>
-              <a:t>R10</a:t>
-            </a:r>
-          </a:p>
-        </p:txBody>
-      </p:sp>
-      <p:sp>
-        <p:nvSpPr>
-          <p:cNvPr id="58" name="TextBox 57"/>
-          <p:cNvSpPr txBox="1"/>
-          <p:nvPr/>
-        </p:nvSpPr>
-        <p:spPr>
-          <a:xfrm>
-            <a:off x="10515600" y="6446520"/>
-            <a:ext cx="274320" cy="228600"/>
+            <a:off x="10972800" y="6446520"/>
+            <a:ext cx="822960" cy="228600"/>
           </a:xfrm>
           <a:prstGeom prst="rect">
             <a:avLst/>
@@ -24392,86 +22754,8 @@
         </p:nvSpPr>
         <p:spPr>
           <a:xfrm>
-            <a:off x="658368" y="6446520"/>
-            <a:ext cx="7315200" cy="228600"/>
-          </a:xfrm>
-          <a:prstGeom prst="rect">
-            <a:avLst/>
-          </a:prstGeom>
-          <a:noFill/>
-        </p:spPr>
-        <p:txBody>
-          <a:bodyPr wrap="square" anchor="t" lIns="0" rIns="0" tIns="0" bIns="0">
-            <a:spAutoFit/>
-          </a:bodyPr>
-          <a:lstStyle/>
-          <a:p>
-            <a:pPr algn="l">
-              <a:lnSpc>
-                <a:spcPct val="130000"/>
-              </a:lnSpc>
-            </a:pPr>
-            <a:r>
-              <a:rPr sz="900" b="0" i="0">
-                <a:solidFill>
-                  <a:srgbClr val="87867F"/>
-                </a:solidFill>
-                <a:latin typeface="PT Sans"/>
-              </a:rPr>
-              <a:t>S013  ·  обзор эпидемиологии нарушений глотания</a:t>
-            </a:r>
-          </a:p>
-        </p:txBody>
-      </p:sp>
-      <p:sp>
-        <p:nvSpPr>
-          <p:cNvPr id="13" name="TextBox 12"/>
-          <p:cNvSpPr txBox="1"/>
-          <p:nvPr/>
-        </p:nvSpPr>
-        <p:spPr>
-          <a:xfrm>
-            <a:off x="10515600" y="6446520"/>
-            <a:ext cx="1005840" cy="228600"/>
-          </a:xfrm>
-          <a:prstGeom prst="rect">
-            <a:avLst/>
-          </a:prstGeom>
-          <a:noFill/>
-        </p:spPr>
-        <p:txBody>
-          <a:bodyPr wrap="square" anchor="t" lIns="0" rIns="0" tIns="0" bIns="0">
-            <a:spAutoFit/>
-          </a:bodyPr>
-          <a:lstStyle/>
-          <a:p>
-            <a:pPr algn="r">
-              <a:lnSpc>
-                <a:spcPct val="130000"/>
-              </a:lnSpc>
-            </a:pPr>
-            <a:r>
-              <a:rPr sz="900" b="0" i="0">
-                <a:solidFill>
-                  <a:srgbClr val="87867F"/>
-                </a:solidFill>
-                <a:latin typeface="PT Sans"/>
-              </a:rPr>
-              <a:t>3 / 18</a:t>
-            </a:r>
-          </a:p>
-        </p:txBody>
-      </p:sp>
-      <p:sp>
-        <p:nvSpPr>
-          <p:cNvPr id="14" name="TextBox 13"/>
-          <p:cNvSpPr txBox="1"/>
-          <p:nvPr/>
-        </p:nvSpPr>
-        <p:spPr>
-          <a:xfrm>
-            <a:off x="10515600" y="6446520"/>
-            <a:ext cx="365760" cy="228600"/>
+            <a:off x="11155680" y="6446520"/>
+            <a:ext cx="640080" cy="228600"/>
           </a:xfrm>
           <a:prstGeom prst="rect">
             <a:avLst/>
@@ -25146,86 +23430,8 @@
         </p:nvSpPr>
         <p:spPr>
           <a:xfrm>
-            <a:off x="658368" y="6446520"/>
-            <a:ext cx="7315200" cy="228600"/>
-          </a:xfrm>
-          <a:prstGeom prst="rect">
-            <a:avLst/>
-          </a:prstGeom>
-          <a:noFill/>
-        </p:spPr>
-        <p:txBody>
-          <a:bodyPr wrap="square" anchor="t" lIns="0" rIns="0" tIns="0" bIns="0">
-            <a:spAutoFit/>
-          </a:bodyPr>
-          <a:lstStyle/>
-          <a:p>
-            <a:pPr algn="l">
-              <a:lnSpc>
-                <a:spcPct val="130000"/>
-              </a:lnSpc>
-            </a:pPr>
-            <a:r>
-              <a:rPr sz="900" b="0" i="0">
-                <a:solidFill>
-                  <a:srgbClr val="87867F"/>
-                </a:solidFill>
-                <a:latin typeface="PT Sans"/>
-              </a:rPr>
-              <a:t>Доклад, раздел 29</a:t>
-            </a:r>
-          </a:p>
-        </p:txBody>
-      </p:sp>
-      <p:sp>
-        <p:nvSpPr>
-          <p:cNvPr id="16" name="TextBox 15"/>
-          <p:cNvSpPr txBox="1"/>
-          <p:nvPr/>
-        </p:nvSpPr>
-        <p:spPr>
-          <a:xfrm>
-            <a:off x="10515600" y="6446520"/>
-            <a:ext cx="1005840" cy="228600"/>
-          </a:xfrm>
-          <a:prstGeom prst="rect">
-            <a:avLst/>
-          </a:prstGeom>
-          <a:noFill/>
-        </p:spPr>
-        <p:txBody>
-          <a:bodyPr wrap="square" anchor="t" lIns="0" rIns="0" tIns="0" bIns="0">
-            <a:spAutoFit/>
-          </a:bodyPr>
-          <a:lstStyle/>
-          <a:p>
-            <a:pPr algn="r">
-              <a:lnSpc>
-                <a:spcPct val="130000"/>
-              </a:lnSpc>
-            </a:pPr>
-            <a:r>
-              <a:rPr sz="900" b="0" i="0">
-                <a:solidFill>
-                  <a:srgbClr val="87867F"/>
-                </a:solidFill>
-                <a:latin typeface="PT Sans"/>
-              </a:rPr>
-              <a:t>R11</a:t>
-            </a:r>
-          </a:p>
-        </p:txBody>
-      </p:sp>
-      <p:sp>
-        <p:nvSpPr>
-          <p:cNvPr id="17" name="TextBox 16"/>
-          <p:cNvSpPr txBox="1"/>
-          <p:nvPr/>
-        </p:nvSpPr>
-        <p:spPr>
-          <a:xfrm>
-            <a:off x="10515600" y="6446520"/>
-            <a:ext cx="274320" cy="228600"/>
+            <a:off x="10972800" y="6446520"/>
+            <a:ext cx="822960" cy="228600"/>
           </a:xfrm>
           <a:prstGeom prst="rect">
             <a:avLst/>
@@ -26374,86 +24580,8 @@
         </p:nvSpPr>
         <p:spPr>
           <a:xfrm>
-            <a:off x="658368" y="6446520"/>
-            <a:ext cx="7315200" cy="228600"/>
-          </a:xfrm>
-          <a:prstGeom prst="rect">
-            <a:avLst/>
-          </a:prstGeom>
-          <a:noFill/>
-        </p:spPr>
-        <p:txBody>
-          <a:bodyPr wrap="square" anchor="t" lIns="0" rIns="0" tIns="0" bIns="0">
-            <a:spAutoFit/>
-          </a:bodyPr>
-          <a:lstStyle/>
-          <a:p>
-            <a:pPr algn="l">
-              <a:lnSpc>
-                <a:spcPct val="130000"/>
-              </a:lnSpc>
-            </a:pPr>
-            <a:r>
-              <a:rPr sz="900" b="0" i="0">
-                <a:solidFill>
-                  <a:srgbClr val="87867F"/>
-                </a:solidFill>
-                <a:latin typeface="PT Sans"/>
-              </a:rPr>
-              <a:t>Доклад, раздел 22 (панель чисел)</a:t>
-            </a:r>
-          </a:p>
-        </p:txBody>
-      </p:sp>
-      <p:sp>
-        <p:nvSpPr>
-          <p:cNvPr id="30" name="TextBox 29"/>
-          <p:cNvSpPr txBox="1"/>
-          <p:nvPr/>
-        </p:nvSpPr>
-        <p:spPr>
-          <a:xfrm>
-            <a:off x="10515600" y="6446520"/>
-            <a:ext cx="1005840" cy="228600"/>
-          </a:xfrm>
-          <a:prstGeom prst="rect">
-            <a:avLst/>
-          </a:prstGeom>
-          <a:noFill/>
-        </p:spPr>
-        <p:txBody>
-          <a:bodyPr wrap="square" anchor="t" lIns="0" rIns="0" tIns="0" bIns="0">
-            <a:spAutoFit/>
-          </a:bodyPr>
-          <a:lstStyle/>
-          <a:p>
-            <a:pPr algn="r">
-              <a:lnSpc>
-                <a:spcPct val="130000"/>
-              </a:lnSpc>
-            </a:pPr>
-            <a:r>
-              <a:rPr sz="900" b="0" i="0">
-                <a:solidFill>
-                  <a:srgbClr val="87867F"/>
-                </a:solidFill>
-                <a:latin typeface="PT Sans"/>
-              </a:rPr>
-              <a:t>R12</a:t>
-            </a:r>
-          </a:p>
-        </p:txBody>
-      </p:sp>
-      <p:sp>
-        <p:nvSpPr>
-          <p:cNvPr id="31" name="TextBox 30"/>
-          <p:cNvSpPr txBox="1"/>
-          <p:nvPr/>
-        </p:nvSpPr>
-        <p:spPr>
-          <a:xfrm>
-            <a:off x="10515600" y="6446520"/>
-            <a:ext cx="274320" cy="228600"/>
+            <a:off x="10972800" y="6446520"/>
+            <a:ext cx="822960" cy="228600"/>
           </a:xfrm>
           <a:prstGeom prst="rect">
             <a:avLst/>
@@ -27278,86 +25406,8 @@
         </p:nvSpPr>
         <p:spPr>
           <a:xfrm>
-            <a:off x="658368" y="6446520"/>
-            <a:ext cx="7315200" cy="228600"/>
-          </a:xfrm>
-          <a:prstGeom prst="rect">
-            <a:avLst/>
-          </a:prstGeom>
-          <a:noFill/>
-        </p:spPr>
-        <p:txBody>
-          <a:bodyPr wrap="square" anchor="t" lIns="0" rIns="0" tIns="0" bIns="0">
-            <a:spAutoFit/>
-          </a:bodyPr>
-          <a:lstStyle/>
-          <a:p>
-            <a:pPr algn="l">
-              <a:lnSpc>
-                <a:spcPct val="130000"/>
-              </a:lnSpc>
-            </a:pPr>
-            <a:r>
-              <a:rPr sz="900" b="0" i="0">
-                <a:solidFill>
-                  <a:srgbClr val="87867F"/>
-                </a:solidFill>
-                <a:latin typeface="PT Sans"/>
-              </a:rPr>
-              <a:t>S030  ·  Комитет по социальной политике СПб, 22.07.2025</a:t>
-            </a:r>
-          </a:p>
-        </p:txBody>
-      </p:sp>
-      <p:sp>
-        <p:nvSpPr>
-          <p:cNvPr id="22" name="TextBox 21"/>
-          <p:cNvSpPr txBox="1"/>
-          <p:nvPr/>
-        </p:nvSpPr>
-        <p:spPr>
-          <a:xfrm>
-            <a:off x="10515600" y="6446520"/>
-            <a:ext cx="1005840" cy="228600"/>
-          </a:xfrm>
-          <a:prstGeom prst="rect">
-            <a:avLst/>
-          </a:prstGeom>
-          <a:noFill/>
-        </p:spPr>
-        <p:txBody>
-          <a:bodyPr wrap="square" anchor="t" lIns="0" rIns="0" tIns="0" bIns="0">
-            <a:spAutoFit/>
-          </a:bodyPr>
-          <a:lstStyle/>
-          <a:p>
-            <a:pPr algn="r">
-              <a:lnSpc>
-                <a:spcPct val="130000"/>
-              </a:lnSpc>
-            </a:pPr>
-            <a:r>
-              <a:rPr sz="900" b="0" i="0">
-                <a:solidFill>
-                  <a:srgbClr val="87867F"/>
-                </a:solidFill>
-                <a:latin typeface="PT Sans"/>
-              </a:rPr>
-              <a:t>4 / 18</a:t>
-            </a:r>
-          </a:p>
-        </p:txBody>
-      </p:sp>
-      <p:sp>
-        <p:nvSpPr>
-          <p:cNvPr id="23" name="TextBox 22"/>
-          <p:cNvSpPr txBox="1"/>
-          <p:nvPr/>
-        </p:nvSpPr>
-        <p:spPr>
-          <a:xfrm>
-            <a:off x="10515600" y="6446520"/>
-            <a:ext cx="365760" cy="228600"/>
+            <a:off x="11155680" y="6446520"/>
+            <a:ext cx="640080" cy="228600"/>
           </a:xfrm>
           <a:prstGeom prst="rect">
             <a:avLst/>
@@ -27964,86 +26014,8 @@
         </p:nvSpPr>
         <p:spPr>
           <a:xfrm>
-            <a:off x="658368" y="6446520"/>
-            <a:ext cx="7315200" cy="228600"/>
-          </a:xfrm>
-          <a:prstGeom prst="rect">
-            <a:avLst/>
-          </a:prstGeom>
-          <a:noFill/>
-        </p:spPr>
-        <p:txBody>
-          <a:bodyPr wrap="square" anchor="t" lIns="0" rIns="0" tIns="0" bIns="0">
-            <a:spAutoFit/>
-          </a:bodyPr>
-          <a:lstStyle/>
-          <a:p>
-            <a:pPr algn="l">
-              <a:lnSpc>
-                <a:spcPct val="130000"/>
-              </a:lnSpc>
-            </a:pPr>
-            <a:r>
-              <a:rPr sz="900" b="0" i="0">
-                <a:solidFill>
-                  <a:srgbClr val="87867F"/>
-                </a:solidFill>
-                <a:latin typeface="PT Sans"/>
-              </a:rPr>
-              <a:t>S004  ·  проект «Если быть точным», публикация 09.04.2026  ·  ст. 29 ГК, 48-ФЗ</a:t>
-            </a:r>
-          </a:p>
-        </p:txBody>
-      </p:sp>
-      <p:sp>
-        <p:nvSpPr>
-          <p:cNvPr id="15" name="TextBox 14"/>
-          <p:cNvSpPr txBox="1"/>
-          <p:nvPr/>
-        </p:nvSpPr>
-        <p:spPr>
-          <a:xfrm>
-            <a:off x="10515600" y="6446520"/>
-            <a:ext cx="1005840" cy="228600"/>
-          </a:xfrm>
-          <a:prstGeom prst="rect">
-            <a:avLst/>
-          </a:prstGeom>
-          <a:noFill/>
-        </p:spPr>
-        <p:txBody>
-          <a:bodyPr wrap="square" anchor="t" lIns="0" rIns="0" tIns="0" bIns="0">
-            <a:spAutoFit/>
-          </a:bodyPr>
-          <a:lstStyle/>
-          <a:p>
-            <a:pPr algn="r">
-              <a:lnSpc>
-                <a:spcPct val="130000"/>
-              </a:lnSpc>
-            </a:pPr>
-            <a:r>
-              <a:rPr sz="900" b="0" i="0">
-                <a:solidFill>
-                  <a:srgbClr val="87867F"/>
-                </a:solidFill>
-                <a:latin typeface="PT Sans"/>
-              </a:rPr>
-              <a:t>5 / 18</a:t>
-            </a:r>
-          </a:p>
-        </p:txBody>
-      </p:sp>
-      <p:sp>
-        <p:nvSpPr>
-          <p:cNvPr id="16" name="TextBox 15"/>
-          <p:cNvSpPr txBox="1"/>
-          <p:nvPr/>
-        </p:nvSpPr>
-        <p:spPr>
-          <a:xfrm>
-            <a:off x="10515600" y="6446520"/>
-            <a:ext cx="365760" cy="228600"/>
+            <a:off x="11155680" y="6446520"/>
+            <a:ext cx="640080" cy="228600"/>
           </a:xfrm>
           <a:prstGeom prst="rect">
             <a:avLst/>
@@ -29492,86 +27464,8 @@
         </p:nvSpPr>
         <p:spPr>
           <a:xfrm>
-            <a:off x="658368" y="6446520"/>
-            <a:ext cx="7315200" cy="228600"/>
-          </a:xfrm>
-          <a:prstGeom prst="rect">
-            <a:avLst/>
-          </a:prstGeom>
-          <a:noFill/>
-        </p:spPr>
-        <p:txBody>
-          <a:bodyPr wrap="square" anchor="t" lIns="0" rIns="0" tIns="0" bIns="0">
-            <a:spAutoFit/>
-          </a:bodyPr>
-          <a:lstStyle/>
-          <a:p>
-            <a:pPr algn="l">
-              <a:lnSpc>
-                <a:spcPct val="130000"/>
-              </a:lnSpc>
-            </a:pPr>
-            <a:r>
-              <a:rPr sz="900" b="0" i="0">
-                <a:solidFill>
-                  <a:srgbClr val="87867F"/>
-                </a:solidFill>
-                <a:latin typeface="PT Sans"/>
-              </a:rPr>
-              <a:t>Доклад, раздел 7.4, 26  ·  Швеция ≤11 ч  ·  сравнение ограничено</a:t>
-            </a:r>
-          </a:p>
-        </p:txBody>
-      </p:sp>
-      <p:sp>
-        <p:nvSpPr>
-          <p:cNvPr id="36" name="TextBox 35"/>
-          <p:cNvSpPr txBox="1"/>
-          <p:nvPr/>
-        </p:nvSpPr>
-        <p:spPr>
-          <a:xfrm>
-            <a:off x="10515600" y="6446520"/>
-            <a:ext cx="1005840" cy="228600"/>
-          </a:xfrm>
-          <a:prstGeom prst="rect">
-            <a:avLst/>
-          </a:prstGeom>
-          <a:noFill/>
-        </p:spPr>
-        <p:txBody>
-          <a:bodyPr wrap="square" anchor="t" lIns="0" rIns="0" tIns="0" bIns="0">
-            <a:spAutoFit/>
-          </a:bodyPr>
-          <a:lstStyle/>
-          <a:p>
-            <a:pPr algn="r">
-              <a:lnSpc>
-                <a:spcPct val="130000"/>
-              </a:lnSpc>
-            </a:pPr>
-            <a:r>
-              <a:rPr sz="900" b="0" i="0">
-                <a:solidFill>
-                  <a:srgbClr val="87867F"/>
-                </a:solidFill>
-                <a:latin typeface="PT Sans"/>
-              </a:rPr>
-              <a:t>6 / 18</a:t>
-            </a:r>
-          </a:p>
-        </p:txBody>
-      </p:sp>
-      <p:sp>
-        <p:nvSpPr>
-          <p:cNvPr id="37" name="TextBox 36"/>
-          <p:cNvSpPr txBox="1"/>
-          <p:nvPr/>
-        </p:nvSpPr>
-        <p:spPr>
-          <a:xfrm>
-            <a:off x="10515600" y="6446520"/>
-            <a:ext cx="365760" cy="228600"/>
+            <a:off x="11155680" y="6446520"/>
+            <a:ext cx="640080" cy="228600"/>
           </a:xfrm>
           <a:prstGeom prst="rect">
             <a:avLst/>
@@ -30681,7 +28575,7 @@
                 </a:solidFill>
                 <a:latin typeface="PT Sans"/>
               </a:rPr>
-              <a:t>Источники: 442-ФЗ ст. 9, 16, 32 ч. 4  ·  3185-1 ст. 5, 37, 43  ·  ГК ст. 29  ·  доклад, разделы 31, 32</a:t>
+              <a:t>Источники: 442-ФЗ ст. 9, 16, 32 ч. 4  ·  3185-1 ст. 5 ч. 2; ст. 37, 43  ·  ГК ст. 29  ·  доклад, разделы 31, 32</a:t>
             </a:r>
           </a:p>
         </p:txBody>
@@ -30694,86 +28588,8 @@
         </p:nvSpPr>
         <p:spPr>
           <a:xfrm>
-            <a:off x="658368" y="6446520"/>
-            <a:ext cx="7315200" cy="228600"/>
-          </a:xfrm>
-          <a:prstGeom prst="rect">
-            <a:avLst/>
-          </a:prstGeom>
-          <a:noFill/>
-        </p:spPr>
-        <p:txBody>
-          <a:bodyPr wrap="square" anchor="t" lIns="0" rIns="0" tIns="0" bIns="0">
-            <a:spAutoFit/>
-          </a:bodyPr>
-          <a:lstStyle/>
-          <a:p>
-            <a:pPr algn="l">
-              <a:lnSpc>
-                <a:spcPct val="130000"/>
-              </a:lnSpc>
-            </a:pPr>
-            <a:r>
-              <a:rPr sz="900" b="0" i="0">
-                <a:solidFill>
-                  <a:srgbClr val="87867F"/>
-                </a:solidFill>
-                <a:latin typeface="PT Sans"/>
-              </a:rPr>
-              <a:t>Без комплекта та же практика выглядит как отступление от раскладки</a:t>
-            </a:r>
-          </a:p>
-        </p:txBody>
-      </p:sp>
-      <p:sp>
-        <p:nvSpPr>
-          <p:cNvPr id="30" name="TextBox 29"/>
-          <p:cNvSpPr txBox="1"/>
-          <p:nvPr/>
-        </p:nvSpPr>
-        <p:spPr>
-          <a:xfrm>
-            <a:off x="10515600" y="6446520"/>
-            <a:ext cx="1005840" cy="228600"/>
-          </a:xfrm>
-          <a:prstGeom prst="rect">
-            <a:avLst/>
-          </a:prstGeom>
-          <a:noFill/>
-        </p:spPr>
-        <p:txBody>
-          <a:bodyPr wrap="square" anchor="t" lIns="0" rIns="0" tIns="0" bIns="0">
-            <a:spAutoFit/>
-          </a:bodyPr>
-          <a:lstStyle/>
-          <a:p>
-            <a:pPr algn="r">
-              <a:lnSpc>
-                <a:spcPct val="130000"/>
-              </a:lnSpc>
-            </a:pPr>
-            <a:r>
-              <a:rPr sz="900" b="0" i="0">
-                <a:solidFill>
-                  <a:srgbClr val="87867F"/>
-                </a:solidFill>
-                <a:latin typeface="PT Sans"/>
-              </a:rPr>
-              <a:t>7 / 18</a:t>
-            </a:r>
-          </a:p>
-        </p:txBody>
-      </p:sp>
-      <p:sp>
-        <p:nvSpPr>
-          <p:cNvPr id="31" name="TextBox 30"/>
-          <p:cNvSpPr txBox="1"/>
-          <p:nvPr/>
-        </p:nvSpPr>
-        <p:spPr>
-          <a:xfrm>
-            <a:off x="10515600" y="6446520"/>
-            <a:ext cx="365760" cy="228600"/>
+            <a:off x="11155680" y="6446520"/>
+            <a:ext cx="640080" cy="228600"/>
           </a:xfrm>
           <a:prstGeom prst="rect">
             <a:avLst/>
@@ -31429,86 +29245,8 @@
         </p:nvSpPr>
         <p:spPr>
           <a:xfrm>
-            <a:off x="658368" y="6446520"/>
-            <a:ext cx="7315200" cy="228600"/>
-          </a:xfrm>
-          <a:prstGeom prst="rect">
-            <a:avLst/>
-          </a:prstGeom>
-          <a:noFill/>
-        </p:spPr>
-        <p:txBody>
-          <a:bodyPr wrap="square" anchor="t" lIns="0" rIns="0" tIns="0" bIns="0">
-            <a:spAutoFit/>
-          </a:bodyPr>
-          <a:lstStyle/>
-          <a:p>
-            <a:pPr algn="l">
-              <a:lnSpc>
-                <a:spcPct val="130000"/>
-              </a:lnSpc>
-            </a:pPr>
-            <a:r>
-              <a:rPr sz="900" b="0" i="0">
-                <a:solidFill>
-                  <a:srgbClr val="87867F"/>
-                </a:solidFill>
-                <a:latin typeface="PT Sans"/>
-              </a:rPr>
-              <a:t>Успенский, Болотнинский, Усть-Илимск, Серафимовский — в резерве R3–R6</a:t>
-            </a:r>
-          </a:p>
-        </p:txBody>
-      </p:sp>
-      <p:sp>
-        <p:nvSpPr>
-          <p:cNvPr id="16" name="TextBox 15"/>
-          <p:cNvSpPr txBox="1"/>
-          <p:nvPr/>
-        </p:nvSpPr>
-        <p:spPr>
-          <a:xfrm>
-            <a:off x="10515600" y="6446520"/>
-            <a:ext cx="1005840" cy="228600"/>
-          </a:xfrm>
-          <a:prstGeom prst="rect">
-            <a:avLst/>
-          </a:prstGeom>
-          <a:noFill/>
-        </p:spPr>
-        <p:txBody>
-          <a:bodyPr wrap="square" anchor="t" lIns="0" rIns="0" tIns="0" bIns="0">
-            <a:spAutoFit/>
-          </a:bodyPr>
-          <a:lstStyle/>
-          <a:p>
-            <a:pPr algn="r">
-              <a:lnSpc>
-                <a:spcPct val="130000"/>
-              </a:lnSpc>
-            </a:pPr>
-            <a:r>
-              <a:rPr sz="900" b="0" i="0">
-                <a:solidFill>
-                  <a:srgbClr val="87867F"/>
-                </a:solidFill>
-                <a:latin typeface="PT Sans"/>
-              </a:rPr>
-              <a:t>8 / 18</a:t>
-            </a:r>
-          </a:p>
-        </p:txBody>
-      </p:sp>
-      <p:sp>
-        <p:nvSpPr>
-          <p:cNvPr id="17" name="TextBox 16"/>
-          <p:cNvSpPr txBox="1"/>
-          <p:nvPr/>
-        </p:nvSpPr>
-        <p:spPr>
-          <a:xfrm>
-            <a:off x="10515600" y="6446520"/>
-            <a:ext cx="365760" cy="228600"/>
+            <a:off x="11155680" y="6446520"/>
+            <a:ext cx="640080" cy="228600"/>
           </a:xfrm>
           <a:prstGeom prst="rect">
             <a:avLst/>
@@ -32163,86 +29901,8 @@
         </p:nvSpPr>
         <p:spPr>
           <a:xfrm>
-            <a:off x="658368" y="6446520"/>
-            <a:ext cx="7315200" cy="228600"/>
-          </a:xfrm>
-          <a:prstGeom prst="rect">
-            <a:avLst/>
-          </a:prstGeom>
-          <a:noFill/>
-        </p:spPr>
-        <p:txBody>
-          <a:bodyPr wrap="square" anchor="t" lIns="0" rIns="0" tIns="0" bIns="0">
-            <a:spAutoFit/>
-          </a:bodyPr>
-          <a:lstStyle/>
-          <a:p>
-            <a:pPr algn="l">
-              <a:lnSpc>
-                <a:spcPct val="130000"/>
-              </a:lnSpc>
-            </a:pPr>
-            <a:r>
-              <a:rPr sz="900" b="0" i="0">
-                <a:solidFill>
-                  <a:srgbClr val="87867F"/>
-                </a:solidFill>
-                <a:latin typeface="PT Sans"/>
-              </a:rPr>
-              <a:t>Кейс — часть практики, не доказательство эффекта</a:t>
-            </a:r>
-          </a:p>
-        </p:txBody>
-      </p:sp>
-      <p:sp>
-        <p:nvSpPr>
-          <p:cNvPr id="18" name="TextBox 17"/>
-          <p:cNvSpPr txBox="1"/>
-          <p:nvPr/>
-        </p:nvSpPr>
-        <p:spPr>
-          <a:xfrm>
-            <a:off x="10515600" y="6446520"/>
-            <a:ext cx="1005840" cy="228600"/>
-          </a:xfrm>
-          <a:prstGeom prst="rect">
-            <a:avLst/>
-          </a:prstGeom>
-          <a:noFill/>
-        </p:spPr>
-        <p:txBody>
-          <a:bodyPr wrap="square" anchor="t" lIns="0" rIns="0" tIns="0" bIns="0">
-            <a:spAutoFit/>
-          </a:bodyPr>
-          <a:lstStyle/>
-          <a:p>
-            <a:pPr algn="r">
-              <a:lnSpc>
-                <a:spcPct val="130000"/>
-              </a:lnSpc>
-            </a:pPr>
-            <a:r>
-              <a:rPr sz="900" b="0" i="0">
-                <a:solidFill>
-                  <a:srgbClr val="87867F"/>
-                </a:solidFill>
-                <a:latin typeface="PT Sans"/>
-              </a:rPr>
-              <a:t>9 / 18</a:t>
-            </a:r>
-          </a:p>
-        </p:txBody>
-      </p:sp>
-      <p:sp>
-        <p:nvSpPr>
-          <p:cNvPr id="19" name="TextBox 18"/>
-          <p:cNvSpPr txBox="1"/>
-          <p:nvPr/>
-        </p:nvSpPr>
-        <p:spPr>
-          <a:xfrm>
-            <a:off x="10515600" y="6446520"/>
-            <a:ext cx="365760" cy="228600"/>
+            <a:off x="11155680" y="6446520"/>
+            <a:ext cx="640080" cy="228600"/>
           </a:xfrm>
           <a:prstGeom prst="rect">
             <a:avLst/>
